--- a/en/slides/01-Computer_Architecture-PRG32_and_PRG32-QT_Setup-Code.pptx
+++ b/en/slides/01-Computer_Architecture-PRG32_and_PRG32-QT_Setup-Code.pptx
@@ -134,13 +134,13 @@
   <p:extLst>
     <p:ext uri="{521415D9-36F7-43E2-AB2F-B90AF26B5E84}">
       <p14:sectionLst xmlns:p14="http://schemas.microsoft.com/office/powerpoint/2010/main">
-        <p14:section name="Opening" id="{bf4efff8-15da-aa98-721e-f98e07bd3c60}">
+        <p14:section name="Opening" id="{99caac1f-b540-81b2-ccef-53593cea7725}">
           <p14:sldIdLst>
             <p14:sldId id="256"/>
             <p14:sldId id="257"/>
           </p14:sldIdLst>
         </p14:section>
-        <p14:section name="The listings" id="{99775b8c-fd64-19be-cd2e-1e0ec80626b8}">
+        <p14:section name="Step 1: install PRG32-QT" id="{08da7904-0f50-925f-73c7-623d53320c04}">
           <p14:sldIdLst>
             <p14:sldId id="258"/>
             <p14:sldId id="259"/>
@@ -148,27 +148,39 @@
             <p14:sldId id="261"/>
             <p14:sldId id="262"/>
             <p14:sldId id="263"/>
+          </p14:sldIdLst>
+        </p14:section>
+        <p14:section name="Step 2: install the toolchain" id="{da894923-6f3e-3ea0-7870-14a63870ee9f}">
+          <p14:sldIdLst>
             <p14:sldId id="264"/>
             <p14:sldId id="265"/>
             <p14:sldId id="266"/>
             <p14:sldId id="267"/>
             <p14:sldId id="268"/>
+          </p14:sldIdLst>
+        </p14:section>
+        <p14:section name="Step 3: your first build" id="{81a6f296-cea5-babd-594f-e0127f6fb0a5}">
+          <p14:sldIdLst>
             <p14:sldId id="269"/>
             <p14:sldId id="270"/>
             <p14:sldId id="271"/>
             <p14:sldId id="272"/>
+          </p14:sldIdLst>
+        </p14:section>
+        <p14:section name="Optional: QEMU and the kit" id="{a28602d5-e474-373b-8741-e7b4ac1a6802}">
+          <p14:sldIdLst>
             <p14:sldId id="273"/>
             <p14:sldId id="274"/>
           </p14:sldIdLst>
         </p14:section>
-        <p14:section name="The complete program" id="{090a6954-83c2-c6e5-96e7-e6cef7167bbd}">
+        <p14:section name="The complete program" id="{880f9dcb-1317-6d87-b95e-59ebb70c89c0}">
           <p14:sldIdLst>
             <p14:sldId id="275"/>
             <p14:sldId id="276"/>
             <p14:sldId id="277"/>
           </p14:sldIdLst>
         </p14:section>
-        <p14:section name="Run it and test it" id="{7c88a720-006c-3621-ba07-2750b086bdcf}">
+        <p14:section name="Run it and test it" id="{c2b7ad94-ecf9-2c57-e12f-cee9b2ff3a3b}">
           <p14:sldIdLst>
             <p14:sldId id="278"/>
             <p14:sldId id="279"/>
@@ -177,7 +189,7 @@
             <p14:sldId id="282"/>
           </p14:sldIdLst>
         </p14:section>
-        <p14:section name="Exercises" id="{29901a47-e868-25b4-6207-70e2083d381a}">
+        <p14:section name="Exercises" id="{0d6a1280-38df-6fa4-b5bd-7de447c8ec2e}">
           <p14:sldIdLst>
             <p14:sldId id="283"/>
           </p14:sldIdLst>
@@ -3963,7 +3975,63 @@
       </p:sp>
       <p:sp>
         <p:nvSpPr>
-          <p:cNvPr id="11" name="Shape 9"/>
+          <p:cNvPr id="11" name="Text 9"/>
+          <p:cNvSpPr txBox="1"/>
+          <p:nvPr/>
+        </p:nvSpPr>
+        <p:spPr>
+          <a:xfrm>
+            <a:off x="4693615" y="566928"/>
+            <a:ext cx="6949440" cy="640080"/>
+          </a:xfrm>
+          <a:prstGeom prst="rect">
+            <a:avLst/>
+          </a:prstGeom>
+          <a:noFill/>
+          <a:ln/>
+        </p:spPr>
+        <p:txBody>
+          <a:bodyPr wrap="square" lIns="0" tIns="0" rIns="0" bIns="0" rtlCol="0" anchor="t"/>
+          <a:lstStyle/>
+          <a:p>
+            <a:pPr algn="r" indent="0" marL="0">
+              <a:buNone/>
+            </a:pPr>
+            <a:r>
+              <a:rPr lang="en-US" sz="1300" dirty="0">
+                <a:solidFill>
+                  <a:srgbClr val="CFE3EA"/>
+                </a:solidFill>
+                <a:latin typeface="Calibri" pitchFamily="34" charset="0"/>
+                <a:ea typeface="Calibri" pitchFamily="34" charset="-122"/>
+                <a:cs typeface="Calibri" pitchFamily="34" charset="-120"/>
+              </a:rPr>
+              <a:t>Code deck. The concepts, the figures and the questions are in the lecture deck:</a:t>
+            </a:r>
+            <a:endParaRPr lang="en-US" sz="1300" dirty="0"/>
+          </a:p>
+          <a:p>
+            <a:pPr algn="r" indent="0" marL="0">
+              <a:buNone/>
+            </a:pPr>
+            <a:r>
+              <a:rPr lang="en-US" sz="1300" dirty="0">
+                <a:solidFill>
+                  <a:srgbClr val="CFE3EA"/>
+                </a:solidFill>
+                <a:latin typeface="Calibri" pitchFamily="34" charset="0"/>
+                <a:ea typeface="Calibri" pitchFamily="34" charset="-122"/>
+                <a:cs typeface="Calibri" pitchFamily="34" charset="-120"/>
+              </a:rPr>
+              <a:t>01-Computer_Architecture-PRG32_and_PRG32-QT_Setup.pptx</a:t>
+            </a:r>
+            <a:endParaRPr lang="en-US" sz="1300" dirty="0"/>
+          </a:p>
+        </p:txBody>
+      </p:sp>
+      <p:sp>
+        <p:nvSpPr>
+          <p:cNvPr id="12" name="Shape 10"/>
           <p:cNvSpPr/>
           <p:nvPr/>
         </p:nvSpPr>
@@ -3990,7 +4058,7 @@
       </p:sp>
       <p:pic>
         <p:nvPicPr>
-          <p:cNvPr id="12" name="Image 0" descr="/Users/raffaelemontella/devel/riscv-prg32/computer-architecture-with-prg32/tools/assets/prg32qt_debugger.png">    </p:cNvPr>
+          <p:cNvPr id="13" name="Image 0" descr="/Users/raffaelemontella/devel/riscv-prg32/computer-architecture-with-prg32/tools/assets/prg32qt_debugger.png">    </p:cNvPr>
           <p:cNvPicPr>
             <a:picLocks noChangeAspect="1"/>
           </p:cNvPicPr>

--- a/en/slides/01-Computer_Architecture-PRG32_and_PRG32-QT_Setup-Code.pptx
+++ b/en/slides/01-Computer_Architecture-PRG32_and_PRG32-QT_Setup-Code.pptx
@@ -134,13 +134,13 @@
   <p:extLst>
     <p:ext uri="{521415D9-36F7-43E2-AB2F-B90AF26B5E84}">
       <p14:sectionLst xmlns:p14="http://schemas.microsoft.com/office/powerpoint/2010/main">
-        <p14:section name="Opening" id="{99caac1f-b540-81b2-ccef-53593cea7725}">
+        <p14:section name="Opening" id="{0d204205-9ef9-0d76-5330-a816473c28f8}">
           <p14:sldIdLst>
             <p14:sldId id="256"/>
             <p14:sldId id="257"/>
           </p14:sldIdLst>
         </p14:section>
-        <p14:section name="Step 1: install PRG32-QT" id="{08da7904-0f50-925f-73c7-623d53320c04}">
+        <p14:section name="Step 1: install PRG32-QT" id="{d31ec627-0e6c-0ae6-e736-d9e385026cf5}">
           <p14:sldIdLst>
             <p14:sldId id="258"/>
             <p14:sldId id="259"/>
@@ -150,7 +150,7 @@
             <p14:sldId id="263"/>
           </p14:sldIdLst>
         </p14:section>
-        <p14:section name="Step 2: install the toolchain" id="{da894923-6f3e-3ea0-7870-14a63870ee9f}">
+        <p14:section name="Step 2: install the toolchain" id="{85a2508f-b13c-a3b7-0bff-3664b0970c84}">
           <p14:sldIdLst>
             <p14:sldId id="264"/>
             <p14:sldId id="265"/>
@@ -159,7 +159,7 @@
             <p14:sldId id="268"/>
           </p14:sldIdLst>
         </p14:section>
-        <p14:section name="Step 3: your first build" id="{81a6f296-cea5-babd-594f-e0127f6fb0a5}">
+        <p14:section name="Step 3: your first build" id="{50e96c5e-5328-6662-05e3-56959bfe3253}">
           <p14:sldIdLst>
             <p14:sldId id="269"/>
             <p14:sldId id="270"/>
@@ -167,20 +167,20 @@
             <p14:sldId id="272"/>
           </p14:sldIdLst>
         </p14:section>
-        <p14:section name="Optional: QEMU and the kit" id="{a28602d5-e474-373b-8741-e7b4ac1a6802}">
+        <p14:section name="Optional: QEMU and the kit" id="{84a63e8b-70b2-9029-37e2-c274cb5c0df3}">
           <p14:sldIdLst>
             <p14:sldId id="273"/>
             <p14:sldId id="274"/>
           </p14:sldIdLst>
         </p14:section>
-        <p14:section name="The complete program" id="{880f9dcb-1317-6d87-b95e-59ebb70c89c0}">
+        <p14:section name="The complete program" id="{a5cdea15-9324-7382-5739-28bdecb26169}">
           <p14:sldIdLst>
             <p14:sldId id="275"/>
             <p14:sldId id="276"/>
             <p14:sldId id="277"/>
           </p14:sldIdLst>
         </p14:section>
-        <p14:section name="Run it and test it" id="{c2b7ad94-ecf9-2c57-e12f-cee9b2ff3a3b}">
+        <p14:section name="Run it and test it" id="{aed0849d-0c75-b859-af1d-5b060b147153}">
           <p14:sldIdLst>
             <p14:sldId id="278"/>
             <p14:sldId id="279"/>
@@ -189,7 +189,7 @@
             <p14:sldId id="282"/>
           </p14:sldIdLst>
         </p14:section>
-        <p14:section name="Exercises" id="{0d6a1280-38df-6fa4-b5bd-7de447c8ec2e}">
+        <p14:section name="Exercises" id="{f5967cad-faed-61cf-3483-7b9269908700}">
           <p14:sldIdLst>
             <p14:sldId id="283"/>
           </p14:sldIdLst>
@@ -598,7 +598,9 @@
           <a:p>
             <a:r>
               <a:rPr lang="en-US" dirty="0"/>
-              <a:t>This is the code deck of Lecture 01. The lecture deck holds the concepts; this one holds everything you type and run: the listings with their explanation, the complete program, what it shows, and the way to test it on each of the three hosts.</a:t>
+              <a:t>This is the code deck of Lecture 01. The lecture deck holds the concepts; this one holds everything you type and run: the listings with their explanation, the complete program, what it shows, and the way to test it on each of the three hosts.
+Learning status: UNDERSTAND NOW, by the end of this lecture you explain it, trace it and apply it on your own; USE NOW, you follow and use the recipe today; how it works inside is explained later, or is not part of the course; UNDERSTAND LATER, recognise the name and what it is for; a later lecture explains it. A slide without a badge is context: a story, an example, a question, an exercise.
+Learning status of this lecture. UNDERSTAND NOW: the pieces of PRG32. USE NOW: the PRG32 tools, the PRG32-QT debugger, the complete program (used, not studied, in this course). UNDERSTAND LATER: the init, update, draw contract (Lecture 02); registers (Lecture 02). A slide without a badge is context: a story, an example, a question, an exercise.</a:t>
             </a:r>
             <a:endParaRPr lang="en-US" dirty="0"/>
           </a:p>
@@ -687,6 +689,7 @@
             <a:r>
               <a:rPr lang="en-US" dirty="0"/>
               <a:t>On macOS there are three blocks. Homebrew installs the prerequisites. Then ESP-IDF is cloned and install.sh downloads the compilers for the two chips: be patient, it is the long part. The line . ./export.sh begins with a dot and a space, and the dot matters: it makes the script change the terminal you are in, instead of a copy that disappears. The last block clones PRG32 and runs the doctor. The same commands work on Apple Silicon and on Intel.
+USE NOW: the PRG32 tools (used, not studied, in this course).
 For the lecturer: From the README of PRG32. git may first ask to install the Xcode command line tools: accept. The recursive clone and install.sh fetch a few gigabytes.</a:t>
             </a:r>
             <a:endParaRPr lang="en-US" dirty="0"/>
@@ -776,6 +779,7 @@
             <a:r>
               <a:rPr lang="en-US" dirty="0"/>
               <a:t>On Debian and Ubuntu the first block is one long apt command, split over three lines by the backslashes: copy it whole. Steps 2 and 3 are identical to those of macOS. On other distributions the packages are the same, with other names. The last callout concerns only those who have a kit: your user must belong to the group dialout to reach the serial port of the board, and you must log out and in again for the change to take effect.
+USE NOW: the PRG32 tools (used, not studied, in this course).
 For the lecturer: From the README of PRG32. The dialout group gives access to the serial port of the board: log out and in again after the command. It is not needed for PRG32-QT or QEMU.</a:t>
             </a:r>
             <a:endParaRPr lang="en-US" dirty="0"/>
@@ -865,6 +869,7 @@
             <a:r>
               <a:rPr lang="en-US" dirty="0"/>
               <a:t>This slide is the daily routine, and it prevents the most common mistake of the first weeks. In every new terminal, before anything else, activate ESP-IDF with export.sh and move into the PRG32 folder. Two aliases save typing: get_idf activates, prg stands for python3 -m prg32. On Windows, opening ESP-IDF PowerShell does the same. Try it deliberately once: open a new terminal, run the doctor without activating, and read the error. Having seen it here, you will recognise it at once later.
+USE NOW: the PRG32 tools (used, not studied, in this course).
 For the lecturer: The single most common mistake of the first weeks. Make the students close the terminal, open a new one and run doctor without activating: they must see the error once, here, and not during a tutorial.</a:t>
             </a:r>
             <a:endParaRPr lang="en-US" dirty="0"/>
@@ -954,6 +959,7 @@
             <a:r>
               <a:rPr lang="en-US" dirty="0"/>
               <a:t>The doctor checks the installation and prints one line per check. [OK] idf.py found means that ESP-IDF is active. [OK] riscv32-esp-elf-gcc found means that the RISC-V compiler can be reached. The lines about partitions mean that the PRG32 folder is complete. A line that begins with [ERROR] says what is wrong and what to do: read it to the end before asking for help. When every line is OK, level 2 is done. The last lines of the listing show the error you get in a terminal where ESP-IDF is not active.
+USE NOW: the PRG32 tools (used, not studied, in this course).
 For the lecturer: Messages of the doctor of October 2026. The four cartridge slots, cart0 to cart3, are regions of the flash memory of the board: 131072 bytes each. If doctor passes, level 2 is done.</a:t>
             </a:r>
             <a:endParaRPr lang="en-US" dirty="0"/>
@@ -1043,6 +1049,7 @@
             <a:r>
               <a:rPr lang="en-US" dirty="0"/>
               <a:t>The command cartridge build takes a source file and writes a .prg32 file. Three options are worth understanding. --entry-prefix pong_c is the name that precedes _init, _update and _draw in the source. --portable makes a cartridge that runs on every host, not only on one firmware image. --out names the result. The tool answers with the size of the code: a whole game of Pong is about three thousand bytes. The source here is C, taken from the examples, so that you test the compiler without writing a program.
+USE NOW: the PRG32 tools (used, not studied, in this course). UNDERSTAND LATER: the init, update, draw contract (studied in Lecture 02).
 For the lecturer: Pong in C from the examples of the repository: it proves that the compiler works without typing a program. In Lecture 02 the source is yours, in assembly, and the command is the same. On Windows write python and put the command on one line.</a:t>
             </a:r>
             <a:endParaRPr lang="en-US" dirty="0"/>
@@ -1132,6 +1139,7 @@
             <a:r>
               <a:rPr lang="en-US" dirty="0"/>
               <a:t>PRG32-QT must be running. The first command, runtime, asks it for its state: if it answers, the connection works. The second, upload-and-run, stores the cartridge in slot cart0 and starts it; the game appears in the window of PRG32-QT. The command says esp32c6 because, for the tool, PRG32-QT behaves like a board that listens on port 8080. The same command with the address of a real board, http://192.168.4.1, sends the game there. Without the tools you can also import the file from the menu of PRG32-QT.
+USE NOW: the PRG32 tools (used, not studied, in this course).
 For the lecturer: Run for these slides on macOS. If localhost does not answer, read the address on the Setup screen of PRG32-QT and use it. Without the tools: in PRG32-QT import the file pong.prg32 and choose Run Cartridge. The same command with --url http://192.168.4.1 sends the game to a real board.</a:t>
             </a:r>
             <a:endParaRPr lang="en-US" dirty="0"/>
@@ -1221,6 +1229,7 @@
             <a:r>
               <a:rPr lang="en-US" dirty="0"/>
               <a:t>Now open the machine. In Settings enable Run cartridges in RISC-V debug mode and run the cartridge again: the game is on the left, the machine on the right. Pause: one instruction is highlighted, the next to be executed. Step a few times: the highlight moves and some registers change. Update and Draw show those two functions of the cartridge. Resume, then lower the speed and watch the game in slow motion. You are not expected to understand the registers today; the point is that the debugger opens and obeys.
+USE NOW: the PRG32-QT debugger (used, not studied, in this course). UNDERSTAND LATER: registers (studied in Lecture 02).
 For the lecturer: A first look only: Lecture 02 explains what the registers are. The point today is that the debugger opens and responds. Debug mode stays on until you switch it off. Pause, resume and step are the three transport buttons of the debugger, drawn as on a video player: two bars, a triangle, a triangle with a bar. The slides and the tutorials call them Pause, Resume and Step.</a:t>
             </a:r>
             <a:endParaRPr lang="en-US" dirty="0"/>
@@ -1310,6 +1319,7 @@
             <a:r>
               <a:rPr lang="en-US" dirty="0"/>
               <a:t>This is what you should see: on the right the listing in assembly with the current instruction highlighted, the thirty-two registers, a window on memory and the counters of the frame. Every element of this picture will be explained in the coming lectures, starting with the registers in Lecture 02. If you see this screen with a cartridge that you built yourself, your workshop is complete.
+USE NOW: the PRG32-QT debugger (used, not studied, in this course). UNDERSTAND LATER: registers (studied in Lecture 02).
 For the lecturer: From the documentation of PRG32-QT.</a:t>
             </a:r>
             <a:endParaRPr lang="en-US" dirty="0"/>
@@ -1399,6 +1409,7 @@
             <a:r>
               <a:rPr lang="en-US" dirty="0"/>
               <a:t>Level 3 has three parts: the libraries that the emulator needs for its window, the emulator itself, and three commands of the tool. qemu build compiles the whole firmware, which takes several minutes the first time. qemu upload stages a cartridge into the flash image, and QEMU must be closed while it runs. qemu run starts the emulator, which opens on the Setup menu: choose Run Cartridge and then cart0. Remember to type in the terminal, not in the window with the picture.
+USE NOW: the PRG32 tools (used, not studied, in this course).
 For the lecturer: From the README and docs/usage/qemu.md of PRG32. Not run for these slides. The first build downloads components and compiles the whole firmware. If upload fails, run QEMU once so that the flash image exists, close it, and upload again. Since October 2026 the firmware starts on the Setup menu by default, on QEMU and on the board: choose Run Cartridge, then the slot. The keys go to the terminal that launched QEMU, not to the window with the picture.</a:t>
             </a:r>
             <a:endParaRPr lang="en-US" dirty="0"/>
@@ -1488,6 +1499,7 @@
             <a:r>
               <a:rPr lang="en-US" dirty="0"/>
               <a:t>Level 4 is the board. Connected by USB, build-and-flash compiles the firmware and writes it into the chip: once per board. The board then starts on the Setup menu and creates a Wi-Fi network called PRG32. Join it, and the upload command you already know works with the address 192.168.4.1: from then on, no cables. The last command makes the board join an existing network instead. On Linux your user must be in the group dialout.
+USE NOW: the PRG32 tools (used, not studied, in this course).
 For the lecturer: From the documentation of PRG32. Not run for these slides. If the serial port is not found pass it explicitly: COMx on Windows, /dev/ttyACM0 on Linux, /dev/cu.usbmodem... on macOS. A black screen after flashing usually means that the QEMU firmware was flashed instead of the board's, or that the display is wired to other pins than those of the firmware: since October 2026 the defaults are GPIO8 for DC and GPIO9 for RST (they were GPIO1 and GPIO0), and idf.py menuconfig changes them.</a:t>
             </a:r>
             <a:endParaRPr lang="en-US" dirty="0"/>
@@ -1666,6 +1678,7 @@
             <a:r>
               <a:rPr lang="en-US" dirty="0"/>
               <a:t>One page of the complete program, exactly as it is in the repository. Read it from the top: the header says what the program shows and how to build it; the three functions init, update and draw follow, then the data. Lines that you met in the listings of the lecture have the same comments here.
+USE NOW: the complete program (used, not studied, in this course).
 For the lecturer: code/l01.S, as built and run by the tests. The comments are part of the program: read them with the code.</a:t>
             </a:r>
             <a:endParaRPr lang="en-US" dirty="0"/>
@@ -1755,6 +1768,7 @@
             <a:r>
               <a:rPr lang="en-US" dirty="0"/>
               <a:t>One page of the complete program, exactly as it is in the repository. Read it from the top: the header says what the program shows and how to build it; the three functions init, update and draw follow, then the data. Lines that you met in the listings of the lecture have the same comments here.
+USE NOW: the complete program (used, not studied, in this course).
 For the lecturer: code/l01.S, as built and run by the tests. The comments are part of the program: read them with the code.</a:t>
             </a:r>
             <a:endParaRPr lang="en-US" dirty="0"/>
@@ -1844,6 +1858,7 @@
             <a:r>
               <a:rPr lang="en-US" dirty="0"/>
               <a:t>One page of the complete program, exactly as it is in the repository. Read it from the top: the header says what the program shows and how to build it; the three functions init, update and draw follow, then the data. Lines that you met in the listings of the lecture have the same comments here.
+USE NOW: the complete program (used, not studied, in this course).
 For the lecturer: code/l01.S, as built and run by the tests. The comments are part of the program: read them with the code.</a:t>
             </a:r>
             <a:endParaRPr lang="en-US" dirty="0"/>
@@ -2022,6 +2037,7 @@
             <a:r>
               <a:rPr lang="en-US" dirty="0"/>
               <a:t>The quickest way: PRG32-QT on your own computer. Four steps, each with its command. PRG32-QT behaves like a board on port 8080, which is why the upload command says esp32c6. With debug mode enabled you can stop at any instruction and read registers and memory.
+USE NOW: the PRG32 tools (used, not studied, in this course).
 For the lecturer: Run by the tests: the cartridge of this slide is built with this command and executed on the headless runner of PRG32-QT. Without the toolchain: import the .prg32 file in PRG32-QT and choose Run Cartridge. Keys: arrows or WASD for the joystick, Z or J for A, X or K for B, Enter for Start, Escape to go back to Setup.</a:t>
             </a:r>
             <a:endParaRPr lang="en-US" dirty="0"/>
@@ -2111,6 +2127,7 @@
             <a:r>
               <a:rPr lang="en-US" dirty="0"/>
               <a:t>The same program on the emulator. QEMU runs the real firmware on an emulated chip, so the cartridge must be built for the architecture qemu. Stage the cartridge while QEMU is closed. The firmware opens on the Setup menu: choose Run Cartridge and the slot. Remember that the keyboard is read by the terminal, not by the window with the picture.
+USE NOW: the PRG32 tools (used, not studied, in this course).
 For the lecturer: Checked by the tests up to the staging: the cartridge is built for the architecture qemu and accepted into the flash image of the emulator. What the emulator then shows is not checked automatically: Espressif QEMU needs its window. Since October 2026 the firmware starts on Setup: choose Run Cartridge, then cart0.</a:t>
             </a:r>
             <a:endParaRPr lang="en-US" dirty="0"/>
@@ -2200,6 +2217,7 @@
             <a:r>
               <a:rPr lang="en-US" dirty="0"/>
               <a:t>The same program on the kit. The firmware is written once, through USB; after that cartridges travel over Wi-Fi. The upload command is the one used for PRG32-QT with the address of the board. This is the only host that the automatic tests do not run: try it, and report what you see.
+USE NOW: the PRG32 tools (used, not studied, in this course).
 For the lecturer: Not run by the tests: there is no board on the test machine. The cartridge for the architecture esp32c6 is built by the tests; the steps are those of the PRG32 documentation. If the serial port is not found pass it explicitly. To use the Wi-Fi of the classroom: python3 -m prg32 wifi set --ssid NAME --password PASSWORD --mode sta.</a:t>
             </a:r>
             <a:endParaRPr lang="en-US" dirty="0"/>
@@ -2289,6 +2307,7 @@
             <a:r>
               <a:rPr lang="en-US" dirty="0"/>
               <a:t>The five most common symptoms, what each means, and what to do. Read the message before changing anything: it nearly always names the cause.
+USE NOW: the PRG32 tools (used, not studied, in this course).
 For the lecturer: The first three rows cover most cases. When asking for help, paste the command and the whole message as text. docs/usage/troubleshooting.md of the PRG32 repository has the complete list.</a:t>
             </a:r>
             <a:endParaRPr lang="en-US" dirty="0"/>
@@ -2467,6 +2486,7 @@
             <a:r>
               <a:rPr lang="en-US" dirty="0"/>
               <a:t>Find the row of your system and download that file from the Releases page of the PRG32-QT repository, always from the latest release. Windows has an installer, macOS a disk image (one for Apple Silicon, one for Intel), Linux and Raspberry Pi OS a Debian package. The number 0.4.1 is the version of October 2026: by the time you read this it may be higher, and the file names follow the same pattern. If you are not sure which Mac you have, the macOS slide tells you how to find out.
+USE NOW: the PRG32 tools (used, not studied, in this course).
 For the lecturer: From github.com/riscv-prg32/PRG32-QT, Releases, the latest one. 0.4.1 is the version of October 2026: the file names follow this pattern with the current number. The file SHA256SUMS-platforms.txt lists the checksums. Android and Android TV packages are on the same page.</a:t>
             </a:r>
             <a:endParaRPr lang="en-US" dirty="0"/>
@@ -2556,6 +2576,7 @@
             <a:r>
               <a:rPr lang="en-US" dirty="0"/>
               <a:t>On Windows there are four moves: download the Setup file, run it, accept the proposed folder, and start PRG32 from the Start menu. Two warnings may appear, and both are expected. SmartScreen may show a blue box because the installer is not from the Microsoft Store: choose More info, then Run anyway. The firewall may ask for permission: allow it on private networks. PRG32-QT listens on port 8080 to receive cartridges from the tools, and you will use this in step 3.
+USE NOW: the PRG32 tools (used, not studied, in this course).
 For the lecturer: The installer contains the Qt libraries and the compiler runtime: nothing else has to be installed. The firewall question appears because PRG32-QT listens on port 8080 for cartridges sent by the tools: step 3 uses it.</a:t>
             </a:r>
             <a:endParaRPr lang="en-US" dirty="0"/>
@@ -2645,6 +2666,7 @@
             <a:r>
               <a:rPr lang="en-US" dirty="0"/>
               <a:t>On a Mac, first find out which processor you have: the Apple menu, About This Mac. "Chip Apple M..." means the ARM64 file; "Processor Intel" means the Intel one. Open the disk image and drag PRG32 onto Applications. At the first start macOS may refuse to open an application that does not come from the App Store: right-click it and choose Open, or use Privacy and Security in the System Settings. Then accept incoming connections and access to the local network, which the application needs to receive cartridges.
+USE NOW: the PRG32 tools (used, not studied, in this course).
 For the lecturer: The first-start step is needed if macOS says that the developer cannot be verified: the application is distributed outside the App Store. The two permissions are for the device interface on port 8080 and its announcement on the local network.</a:t>
             </a:r>
             <a:endParaRPr lang="en-US" dirty="0"/>
@@ -2734,6 +2756,7 @@
             <a:r>
               <a:rPr lang="en-US" dirty="0"/>
               <a:t>On Linux the upper half of the listing installs the package: apt install with ./ before the file name installs the file together with what it depends on. The program is then /usr/bin/PRG32. The requirement to check is Qt 6.5 or newer: Debian 13 and Ubuntu 25.04 have it; Ubuntu 24.04 does not. The lower half is the alternative for older systems, building from source with the script in the repository. Lines that begin with # are comments: do not type them.
+USE NOW: the PRG32 tools (used, not studied, in this course).
 For the lecturer: The package depends on the Qt 6 QML, Multimedia and WebSockets packages of the distribution. Where the system Qt is older than 6.5, install Qt with the online installer of qt.io and build with it. On Raspberry Pi OS use the ARM64 package, or scripts/build-raspbian.sh.</a:t>
             </a:r>
             <a:endParaRPr lang="en-US" dirty="0"/>
@@ -3001,6 +3024,7 @@
             <a:r>
               <a:rPr lang="en-US" dirty="0"/>
               <a:t>On Windows the first three steps use graphical installers: Git, Python, and the ESP-IDF Tools Installer, in which you choose a release 5.4 or newer and the targets esp32c3 and esp32c6. The installer creates a shortcut called ESP-IDF PowerShell: always work in that window, never in a plain terminal. The five commands clone the PRG32 repository, install two Python packages and run the doctor. On Windows the interpreter is called python, not python3.
+USE NOW: the PRG32 tools (used, not studied, in this course).
 For the lecturer: From the README of PRG32. An alternative for those who prefer an editor: Visual Studio Code with the Espressif ESP-IDF extension, which installs the same toolchain. Avoid folders with spaces or accented letters in their path: old build tools do not like them.</a:t>
             </a:r>
             <a:endParaRPr lang="en-US" dirty="0"/>
@@ -4082,6 +4106,420 @@
       </p:pic>
       <p:sp>
         <p:nvSpPr>
+          <p:cNvPr id="14" name="Shape 11"/>
+          <p:cNvSpPr/>
+          <p:nvPr/>
+        </p:nvSpPr>
+        <p:spPr>
+          <a:xfrm>
+            <a:off x="9690303" y="91440"/>
+            <a:ext cx="1952752" cy="274320"/>
+          </a:xfrm>
+          <a:prstGeom prst="rect">
+            <a:avLst/>
+          </a:prstGeom>
+          <a:solidFill>
+            <a:srgbClr val="F3E8FF"/>
+          </a:solidFill>
+          <a:ln w="12700">
+            <a:solidFill>
+              <a:srgbClr val="7E22CE"/>
+            </a:solidFill>
+            <a:prstDash val="dash"/>
+          </a:ln>
+        </p:spPr>
+      </p:sp>
+      <p:sp>
+        <p:nvSpPr>
+          <p:cNvPr id="15" name="Shape 12"/>
+          <p:cNvSpPr/>
+          <p:nvPr/>
+        </p:nvSpPr>
+        <p:spPr>
+          <a:xfrm>
+            <a:off x="9717735" y="128016"/>
+            <a:ext cx="45720" cy="45720"/>
+          </a:xfrm>
+          <a:prstGeom prst="rect">
+            <a:avLst/>
+          </a:prstGeom>
+          <a:solidFill>
+            <a:srgbClr val="7E22CE"/>
+          </a:solidFill>
+          <a:ln w="12700">
+            <a:solidFill>
+              <a:srgbClr val="7E22CE"/>
+            </a:solidFill>
+            <a:prstDash val="solid"/>
+          </a:ln>
+        </p:spPr>
+      </p:sp>
+      <p:sp>
+        <p:nvSpPr>
+          <p:cNvPr id="16" name="Shape 13"/>
+          <p:cNvSpPr/>
+          <p:nvPr/>
+        </p:nvSpPr>
+        <p:spPr>
+          <a:xfrm>
+            <a:off x="9717735" y="205740"/>
+            <a:ext cx="45720" cy="45720"/>
+          </a:xfrm>
+          <a:prstGeom prst="rect">
+            <a:avLst/>
+          </a:prstGeom>
+          <a:solidFill>
+            <a:srgbClr val="7E22CE"/>
+          </a:solidFill>
+          <a:ln w="12700">
+            <a:solidFill>
+              <a:srgbClr val="7E22CE"/>
+            </a:solidFill>
+            <a:prstDash val="solid"/>
+          </a:ln>
+        </p:spPr>
+      </p:sp>
+      <p:sp>
+        <p:nvSpPr>
+          <p:cNvPr id="17" name="Shape 14"/>
+          <p:cNvSpPr/>
+          <p:nvPr/>
+        </p:nvSpPr>
+        <p:spPr>
+          <a:xfrm>
+            <a:off x="9717735" y="283464"/>
+            <a:ext cx="45720" cy="45720"/>
+          </a:xfrm>
+          <a:prstGeom prst="rect">
+            <a:avLst/>
+          </a:prstGeom>
+          <a:solidFill>
+            <a:srgbClr val="7E22CE"/>
+          </a:solidFill>
+          <a:ln w="12700">
+            <a:solidFill>
+              <a:srgbClr val="7E22CE"/>
+            </a:solidFill>
+            <a:prstDash val="solid"/>
+          </a:ln>
+        </p:spPr>
+      </p:sp>
+      <p:pic>
+        <p:nvPicPr>
+          <p:cNvPr id="18" name="Image 1" descr="preencoded.png">    </p:cNvPr>
+          <p:cNvPicPr>
+            <a:picLocks noChangeAspect="1"/>
+          </p:cNvPicPr>
+          <p:nvPr/>
+        </p:nvPicPr>
+        <p:blipFill>
+          <a:blip r:embed="rId2"/>
+          <a:stretch>
+            <a:fillRect/>
+          </a:stretch>
+        </p:blipFill>
+        <p:spPr>
+          <a:xfrm>
+            <a:off x="9818319" y="128016"/>
+            <a:ext cx="201168" cy="201168"/>
+          </a:xfrm>
+          <a:prstGeom prst="rect">
+            <a:avLst/>
+          </a:prstGeom>
+        </p:spPr>
+      </p:pic>
+      <p:sp>
+        <p:nvSpPr>
+          <p:cNvPr id="19" name="Text 15"/>
+          <p:cNvSpPr txBox="1"/>
+          <p:nvPr/>
+        </p:nvSpPr>
+        <p:spPr>
+          <a:xfrm>
+            <a:off x="10074351" y="91440"/>
+            <a:ext cx="1532128" cy="274320"/>
+          </a:xfrm>
+          <a:prstGeom prst="rect">
+            <a:avLst/>
+          </a:prstGeom>
+          <a:noFill/>
+          <a:ln/>
+        </p:spPr>
+        <p:txBody>
+          <a:bodyPr wrap="square" lIns="0" tIns="0" rIns="0" bIns="0" rtlCol="0" anchor="ctr"/>
+          <a:lstStyle/>
+          <a:p>
+            <a:pPr indent="0" marL="0">
+              <a:buNone/>
+            </a:pPr>
+            <a:r>
+              <a:rPr lang="en-US" sz="1100" b="1" dirty="0">
+                <a:solidFill>
+                  <a:srgbClr val="6B21A8"/>
+                </a:solidFill>
+                <a:latin typeface="Calibri" pitchFamily="34" charset="0"/>
+                <a:ea typeface="Calibri" pitchFamily="34" charset="-122"/>
+                <a:cs typeface="Calibri" pitchFamily="34" charset="-120"/>
+              </a:rPr>
+              <a:t>UNDERSTAND LATER</a:t>
+            </a:r>
+            <a:endParaRPr lang="en-US" sz="1100" dirty="0"/>
+          </a:p>
+        </p:txBody>
+      </p:sp>
+      <p:sp>
+        <p:nvSpPr>
+          <p:cNvPr id="20" name="Shape 16"/>
+          <p:cNvSpPr/>
+          <p:nvPr/>
+        </p:nvSpPr>
+        <p:spPr>
+          <a:xfrm>
+            <a:off x="8407349" y="91440"/>
+            <a:ext cx="1173226" cy="274320"/>
+          </a:xfrm>
+          <a:prstGeom prst="rect">
+            <a:avLst/>
+          </a:prstGeom>
+          <a:solidFill>
+            <a:srgbClr val="FEF3C7"/>
+          </a:solidFill>
+          <a:ln w="12700">
+            <a:solidFill>
+              <a:srgbClr val="B45309"/>
+            </a:solidFill>
+            <a:prstDash val="solid"/>
+          </a:ln>
+        </p:spPr>
+      </p:sp>
+      <p:sp>
+        <p:nvSpPr>
+          <p:cNvPr id="21" name="Shape 17"/>
+          <p:cNvSpPr/>
+          <p:nvPr/>
+        </p:nvSpPr>
+        <p:spPr>
+          <a:xfrm>
+            <a:off x="8407349" y="91440"/>
+            <a:ext cx="27432" cy="274320"/>
+          </a:xfrm>
+          <a:prstGeom prst="rect">
+            <a:avLst/>
+          </a:prstGeom>
+          <a:solidFill>
+            <a:srgbClr val="B45309"/>
+          </a:solidFill>
+          <a:ln w="12700">
+            <a:solidFill>
+              <a:srgbClr val="B45309"/>
+            </a:solidFill>
+            <a:prstDash val="solid"/>
+          </a:ln>
+        </p:spPr>
+      </p:sp>
+      <p:sp>
+        <p:nvSpPr>
+          <p:cNvPr id="22" name="Shape 18"/>
+          <p:cNvSpPr/>
+          <p:nvPr/>
+        </p:nvSpPr>
+        <p:spPr>
+          <a:xfrm>
+            <a:off x="8462213" y="91440"/>
+            <a:ext cx="27432" cy="274320"/>
+          </a:xfrm>
+          <a:prstGeom prst="rect">
+            <a:avLst/>
+          </a:prstGeom>
+          <a:solidFill>
+            <a:srgbClr val="B45309"/>
+          </a:solidFill>
+          <a:ln w="12700">
+            <a:solidFill>
+              <a:srgbClr val="B45309"/>
+            </a:solidFill>
+            <a:prstDash val="solid"/>
+          </a:ln>
+        </p:spPr>
+      </p:sp>
+      <p:pic>
+        <p:nvPicPr>
+          <p:cNvPr id="23" name="Image 2" descr="preencoded.png">    </p:cNvPr>
+          <p:cNvPicPr>
+            <a:picLocks noChangeAspect="1"/>
+          </p:cNvPicPr>
+          <p:nvPr/>
+        </p:nvPicPr>
+        <p:blipFill>
+          <a:blip r:embed="rId3"/>
+          <a:stretch>
+            <a:fillRect/>
+          </a:stretch>
+        </p:blipFill>
+        <p:spPr>
+          <a:xfrm>
+            <a:off x="8535365" y="128016"/>
+            <a:ext cx="201168" cy="201168"/>
+          </a:xfrm>
+          <a:prstGeom prst="rect">
+            <a:avLst/>
+          </a:prstGeom>
+        </p:spPr>
+      </p:pic>
+      <p:sp>
+        <p:nvSpPr>
+          <p:cNvPr id="24" name="Text 19"/>
+          <p:cNvSpPr txBox="1"/>
+          <p:nvPr/>
+        </p:nvSpPr>
+        <p:spPr>
+          <a:xfrm>
+            <a:off x="8791397" y="91440"/>
+            <a:ext cx="752602" cy="274320"/>
+          </a:xfrm>
+          <a:prstGeom prst="rect">
+            <a:avLst/>
+          </a:prstGeom>
+          <a:noFill/>
+          <a:ln/>
+        </p:spPr>
+        <p:txBody>
+          <a:bodyPr wrap="square" lIns="0" tIns="0" rIns="0" bIns="0" rtlCol="0" anchor="ctr"/>
+          <a:lstStyle/>
+          <a:p>
+            <a:pPr indent="0" marL="0">
+              <a:buNone/>
+            </a:pPr>
+            <a:r>
+              <a:rPr lang="en-US" sz="1100" b="1" dirty="0">
+                <a:solidFill>
+                  <a:srgbClr val="92400E"/>
+                </a:solidFill>
+                <a:latin typeface="Calibri" pitchFamily="34" charset="0"/>
+                <a:ea typeface="Calibri" pitchFamily="34" charset="-122"/>
+                <a:cs typeface="Calibri" pitchFamily="34" charset="-120"/>
+              </a:rPr>
+              <a:t>USE NOW</a:t>
+            </a:r>
+            <a:endParaRPr lang="en-US" sz="1100" dirty="0"/>
+          </a:p>
+        </p:txBody>
+      </p:sp>
+      <p:sp>
+        <p:nvSpPr>
+          <p:cNvPr id="25" name="Shape 20"/>
+          <p:cNvSpPr/>
+          <p:nvPr/>
+        </p:nvSpPr>
+        <p:spPr>
+          <a:xfrm>
+            <a:off x="6518097" y="91440"/>
+            <a:ext cx="1779524" cy="274320"/>
+          </a:xfrm>
+          <a:prstGeom prst="rect">
+            <a:avLst/>
+          </a:prstGeom>
+          <a:solidFill>
+            <a:srgbClr val="E0F2FE"/>
+          </a:solidFill>
+          <a:ln w="12700">
+            <a:solidFill>
+              <a:srgbClr val="0369A1"/>
+            </a:solidFill>
+            <a:prstDash val="solid"/>
+          </a:ln>
+        </p:spPr>
+      </p:sp>
+      <p:sp>
+        <p:nvSpPr>
+          <p:cNvPr id="26" name="Shape 21"/>
+          <p:cNvSpPr/>
+          <p:nvPr/>
+        </p:nvSpPr>
+        <p:spPr>
+          <a:xfrm>
+            <a:off x="6518097" y="91440"/>
+            <a:ext cx="73152" cy="274320"/>
+          </a:xfrm>
+          <a:prstGeom prst="rect">
+            <a:avLst/>
+          </a:prstGeom>
+          <a:solidFill>
+            <a:srgbClr val="0369A1"/>
+          </a:solidFill>
+          <a:ln w="12700">
+            <a:solidFill>
+              <a:srgbClr val="0369A1"/>
+            </a:solidFill>
+            <a:prstDash val="solid"/>
+          </a:ln>
+        </p:spPr>
+      </p:sp>
+      <p:pic>
+        <p:nvPicPr>
+          <p:cNvPr id="27" name="Image 3" descr="preencoded.png">    </p:cNvPr>
+          <p:cNvPicPr>
+            <a:picLocks noChangeAspect="1"/>
+          </p:cNvPicPr>
+          <p:nvPr/>
+        </p:nvPicPr>
+        <p:blipFill>
+          <a:blip r:embed="rId4"/>
+          <a:stretch>
+            <a:fillRect/>
+          </a:stretch>
+        </p:blipFill>
+        <p:spPr>
+          <a:xfrm>
+            <a:off x="6646113" y="128016"/>
+            <a:ext cx="201168" cy="201168"/>
+          </a:xfrm>
+          <a:prstGeom prst="rect">
+            <a:avLst/>
+          </a:prstGeom>
+        </p:spPr>
+      </p:pic>
+      <p:sp>
+        <p:nvSpPr>
+          <p:cNvPr id="28" name="Text 22"/>
+          <p:cNvSpPr txBox="1"/>
+          <p:nvPr/>
+        </p:nvSpPr>
+        <p:spPr>
+          <a:xfrm>
+            <a:off x="6902145" y="91440"/>
+            <a:ext cx="1358900" cy="274320"/>
+          </a:xfrm>
+          <a:prstGeom prst="rect">
+            <a:avLst/>
+          </a:prstGeom>
+          <a:noFill/>
+          <a:ln/>
+        </p:spPr>
+        <p:txBody>
+          <a:bodyPr wrap="square" lIns="0" tIns="0" rIns="0" bIns="0" rtlCol="0" anchor="ctr"/>
+          <a:lstStyle/>
+          <a:p>
+            <a:pPr indent="0" marL="0">
+              <a:buNone/>
+            </a:pPr>
+            <a:r>
+              <a:rPr lang="en-US" sz="1100" b="1" dirty="0">
+                <a:solidFill>
+                  <a:srgbClr val="075985"/>
+                </a:solidFill>
+                <a:latin typeface="Calibri" pitchFamily="34" charset="0"/>
+                <a:ea typeface="Calibri" pitchFamily="34" charset="-122"/>
+                <a:cs typeface="Calibri" pitchFamily="34" charset="-120"/>
+              </a:rPr>
+              <a:t>UNDERSTAND NOW</a:t>
+            </a:r>
+            <a:endParaRPr lang="en-US" sz="1100" dirty="0"/>
+          </a:p>
+        </p:txBody>
+      </p:sp>
+      <p:sp>
+        <p:nvSpPr>
           <p:cNvPr id="25" name="Slide Number Placeholder 0"/>
           <p:cNvSpPr>
             <a:spLocks noGrp="1"/>
@@ -4969,6 +5407,158 @@
       </p:sp>
       <p:sp>
         <p:nvSpPr>
+          <p:cNvPr id="17" name="Shape 15"/>
+          <p:cNvSpPr/>
+          <p:nvPr/>
+        </p:nvSpPr>
+        <p:spPr>
+          <a:xfrm>
+            <a:off x="9287967" y="91440"/>
+            <a:ext cx="2355088" cy="274320"/>
+          </a:xfrm>
+          <a:prstGeom prst="rect">
+            <a:avLst/>
+          </a:prstGeom>
+          <a:solidFill>
+            <a:srgbClr val="FEF3C7"/>
+          </a:solidFill>
+          <a:ln w="12700">
+            <a:solidFill>
+              <a:srgbClr val="B45309"/>
+            </a:solidFill>
+            <a:prstDash val="solid"/>
+          </a:ln>
+        </p:spPr>
+      </p:sp>
+      <p:sp>
+        <p:nvSpPr>
+          <p:cNvPr id="18" name="Shape 16"/>
+          <p:cNvSpPr/>
+          <p:nvPr/>
+        </p:nvSpPr>
+        <p:spPr>
+          <a:xfrm>
+            <a:off x="9287967" y="91440"/>
+            <a:ext cx="27432" cy="274320"/>
+          </a:xfrm>
+          <a:prstGeom prst="rect">
+            <a:avLst/>
+          </a:prstGeom>
+          <a:solidFill>
+            <a:srgbClr val="B45309"/>
+          </a:solidFill>
+          <a:ln w="12700">
+            <a:solidFill>
+              <a:srgbClr val="B45309"/>
+            </a:solidFill>
+            <a:prstDash val="solid"/>
+          </a:ln>
+        </p:spPr>
+      </p:sp>
+      <p:sp>
+        <p:nvSpPr>
+          <p:cNvPr id="19" name="Shape 17"/>
+          <p:cNvSpPr/>
+          <p:nvPr/>
+        </p:nvSpPr>
+        <p:spPr>
+          <a:xfrm>
+            <a:off x="9342831" y="91440"/>
+            <a:ext cx="27432" cy="274320"/>
+          </a:xfrm>
+          <a:prstGeom prst="rect">
+            <a:avLst/>
+          </a:prstGeom>
+          <a:solidFill>
+            <a:srgbClr val="B45309"/>
+          </a:solidFill>
+          <a:ln w="12700">
+            <a:solidFill>
+              <a:srgbClr val="B45309"/>
+            </a:solidFill>
+            <a:prstDash val="solid"/>
+          </a:ln>
+        </p:spPr>
+      </p:sp>
+      <p:pic>
+        <p:nvPicPr>
+          <p:cNvPr id="20" name="Image 0" descr="preencoded.png">    </p:cNvPr>
+          <p:cNvPicPr>
+            <a:picLocks noChangeAspect="1"/>
+          </p:cNvPicPr>
+          <p:nvPr/>
+        </p:nvPicPr>
+        <p:blipFill>
+          <a:blip r:embed="rId1"/>
+          <a:stretch>
+            <a:fillRect/>
+          </a:stretch>
+        </p:blipFill>
+        <p:spPr>
+          <a:xfrm>
+            <a:off x="9415983" y="128016"/>
+            <a:ext cx="201168" cy="201168"/>
+          </a:xfrm>
+          <a:prstGeom prst="rect">
+            <a:avLst/>
+          </a:prstGeom>
+        </p:spPr>
+      </p:pic>
+      <p:sp>
+        <p:nvSpPr>
+          <p:cNvPr id="21" name="Text 18"/>
+          <p:cNvSpPr txBox="1"/>
+          <p:nvPr/>
+        </p:nvSpPr>
+        <p:spPr>
+          <a:xfrm>
+            <a:off x="9672015" y="91440"/>
+            <a:ext cx="1934464" cy="274320"/>
+          </a:xfrm>
+          <a:prstGeom prst="rect">
+            <a:avLst/>
+          </a:prstGeom>
+          <a:noFill/>
+          <a:ln/>
+        </p:spPr>
+        <p:txBody>
+          <a:bodyPr wrap="square" lIns="0" tIns="0" rIns="0" bIns="0" rtlCol="0" anchor="ctr"/>
+          <a:lstStyle/>
+          <a:p>
+            <a:pPr indent="0" marL="0">
+              <a:buNone/>
+            </a:pPr>
+            <a:r>
+              <a:rPr lang="en-US" sz="1100" b="1" dirty="0">
+                <a:solidFill>
+                  <a:srgbClr val="92400E"/>
+                </a:solidFill>
+                <a:latin typeface="Calibri" pitchFamily="34" charset="0"/>
+                <a:ea typeface="Calibri" pitchFamily="34" charset="-122"/>
+                <a:cs typeface="Calibri" pitchFamily="34" charset="-120"/>
+              </a:rPr>
+              <a:t>USE NOW</a:t>
+            </a:r>
+            <a:pPr indent="0" marL="0">
+              <a:buNone/>
+            </a:pPr>
+            <a:r>
+              <a:rPr lang="en-US" sz="1100" dirty="0">
+                <a:solidFill>
+                  <a:srgbClr val="92400E"/>
+                </a:solidFill>
+                <a:latin typeface="Calibri" pitchFamily="34" charset="0"/>
+                <a:ea typeface="Calibri" pitchFamily="34" charset="-122"/>
+                <a:cs typeface="Calibri" pitchFamily="34" charset="-120"/>
+              </a:rPr>
+              <a:t> · the PRG32 tools</a:t>
+            </a:r>
+            <a:endParaRPr lang="en-US" sz="1100" dirty="0"/>
+          </a:p>
+        </p:txBody>
+      </p:sp>
+      <p:sp>
+        <p:nvSpPr>
           <p:cNvPr id="25" name="Slide Number Placeholder 0"/>
           <p:cNvSpPr>
             <a:spLocks noGrp="1"/>
@@ -5907,6 +6497,158 @@
       </p:sp>
       <p:sp>
         <p:nvSpPr>
+          <p:cNvPr id="17" name="Shape 15"/>
+          <p:cNvSpPr/>
+          <p:nvPr/>
+        </p:nvSpPr>
+        <p:spPr>
+          <a:xfrm>
+            <a:off x="9287967" y="91440"/>
+            <a:ext cx="2355088" cy="274320"/>
+          </a:xfrm>
+          <a:prstGeom prst="rect">
+            <a:avLst/>
+          </a:prstGeom>
+          <a:solidFill>
+            <a:srgbClr val="FEF3C7"/>
+          </a:solidFill>
+          <a:ln w="12700">
+            <a:solidFill>
+              <a:srgbClr val="B45309"/>
+            </a:solidFill>
+            <a:prstDash val="solid"/>
+          </a:ln>
+        </p:spPr>
+      </p:sp>
+      <p:sp>
+        <p:nvSpPr>
+          <p:cNvPr id="18" name="Shape 16"/>
+          <p:cNvSpPr/>
+          <p:nvPr/>
+        </p:nvSpPr>
+        <p:spPr>
+          <a:xfrm>
+            <a:off x="9287967" y="91440"/>
+            <a:ext cx="27432" cy="274320"/>
+          </a:xfrm>
+          <a:prstGeom prst="rect">
+            <a:avLst/>
+          </a:prstGeom>
+          <a:solidFill>
+            <a:srgbClr val="B45309"/>
+          </a:solidFill>
+          <a:ln w="12700">
+            <a:solidFill>
+              <a:srgbClr val="B45309"/>
+            </a:solidFill>
+            <a:prstDash val="solid"/>
+          </a:ln>
+        </p:spPr>
+      </p:sp>
+      <p:sp>
+        <p:nvSpPr>
+          <p:cNvPr id="19" name="Shape 17"/>
+          <p:cNvSpPr/>
+          <p:nvPr/>
+        </p:nvSpPr>
+        <p:spPr>
+          <a:xfrm>
+            <a:off x="9342831" y="91440"/>
+            <a:ext cx="27432" cy="274320"/>
+          </a:xfrm>
+          <a:prstGeom prst="rect">
+            <a:avLst/>
+          </a:prstGeom>
+          <a:solidFill>
+            <a:srgbClr val="B45309"/>
+          </a:solidFill>
+          <a:ln w="12700">
+            <a:solidFill>
+              <a:srgbClr val="B45309"/>
+            </a:solidFill>
+            <a:prstDash val="solid"/>
+          </a:ln>
+        </p:spPr>
+      </p:sp>
+      <p:pic>
+        <p:nvPicPr>
+          <p:cNvPr id="20" name="Image 0" descr="preencoded.png">    </p:cNvPr>
+          <p:cNvPicPr>
+            <a:picLocks noChangeAspect="1"/>
+          </p:cNvPicPr>
+          <p:nvPr/>
+        </p:nvPicPr>
+        <p:blipFill>
+          <a:blip r:embed="rId1"/>
+          <a:stretch>
+            <a:fillRect/>
+          </a:stretch>
+        </p:blipFill>
+        <p:spPr>
+          <a:xfrm>
+            <a:off x="9415983" y="128016"/>
+            <a:ext cx="201168" cy="201168"/>
+          </a:xfrm>
+          <a:prstGeom prst="rect">
+            <a:avLst/>
+          </a:prstGeom>
+        </p:spPr>
+      </p:pic>
+      <p:sp>
+        <p:nvSpPr>
+          <p:cNvPr id="21" name="Text 18"/>
+          <p:cNvSpPr txBox="1"/>
+          <p:nvPr/>
+        </p:nvSpPr>
+        <p:spPr>
+          <a:xfrm>
+            <a:off x="9672015" y="91440"/>
+            <a:ext cx="1934464" cy="274320"/>
+          </a:xfrm>
+          <a:prstGeom prst="rect">
+            <a:avLst/>
+          </a:prstGeom>
+          <a:noFill/>
+          <a:ln/>
+        </p:spPr>
+        <p:txBody>
+          <a:bodyPr wrap="square" lIns="0" tIns="0" rIns="0" bIns="0" rtlCol="0" anchor="ctr"/>
+          <a:lstStyle/>
+          <a:p>
+            <a:pPr indent="0" marL="0">
+              <a:buNone/>
+            </a:pPr>
+            <a:r>
+              <a:rPr lang="en-US" sz="1100" b="1" dirty="0">
+                <a:solidFill>
+                  <a:srgbClr val="92400E"/>
+                </a:solidFill>
+                <a:latin typeface="Calibri" pitchFamily="34" charset="0"/>
+                <a:ea typeface="Calibri" pitchFamily="34" charset="-122"/>
+                <a:cs typeface="Calibri" pitchFamily="34" charset="-120"/>
+              </a:rPr>
+              <a:t>USE NOW</a:t>
+            </a:r>
+            <a:pPr indent="0" marL="0">
+              <a:buNone/>
+            </a:pPr>
+            <a:r>
+              <a:rPr lang="en-US" sz="1100" dirty="0">
+                <a:solidFill>
+                  <a:srgbClr val="92400E"/>
+                </a:solidFill>
+                <a:latin typeface="Calibri" pitchFamily="34" charset="0"/>
+                <a:ea typeface="Calibri" pitchFamily="34" charset="-122"/>
+                <a:cs typeface="Calibri" pitchFamily="34" charset="-120"/>
+              </a:rPr>
+              <a:t> · the PRG32 tools</a:t>
+            </a:r>
+            <a:endParaRPr lang="en-US" sz="1100" dirty="0"/>
+          </a:p>
+        </p:txBody>
+      </p:sp>
+      <p:sp>
+        <p:nvSpPr>
           <p:cNvPr id="25" name="Slide Number Placeholder 0"/>
           <p:cNvSpPr>
             <a:spLocks noGrp="1"/>
@@ -6760,6 +7502,158 @@
       </p:sp>
       <p:sp>
         <p:nvSpPr>
+          <p:cNvPr id="17" name="Shape 15"/>
+          <p:cNvSpPr/>
+          <p:nvPr/>
+        </p:nvSpPr>
+        <p:spPr>
+          <a:xfrm>
+            <a:off x="9287967" y="91440"/>
+            <a:ext cx="2355088" cy="274320"/>
+          </a:xfrm>
+          <a:prstGeom prst="rect">
+            <a:avLst/>
+          </a:prstGeom>
+          <a:solidFill>
+            <a:srgbClr val="FEF3C7"/>
+          </a:solidFill>
+          <a:ln w="12700">
+            <a:solidFill>
+              <a:srgbClr val="B45309"/>
+            </a:solidFill>
+            <a:prstDash val="solid"/>
+          </a:ln>
+        </p:spPr>
+      </p:sp>
+      <p:sp>
+        <p:nvSpPr>
+          <p:cNvPr id="18" name="Shape 16"/>
+          <p:cNvSpPr/>
+          <p:nvPr/>
+        </p:nvSpPr>
+        <p:spPr>
+          <a:xfrm>
+            <a:off x="9287967" y="91440"/>
+            <a:ext cx="27432" cy="274320"/>
+          </a:xfrm>
+          <a:prstGeom prst="rect">
+            <a:avLst/>
+          </a:prstGeom>
+          <a:solidFill>
+            <a:srgbClr val="B45309"/>
+          </a:solidFill>
+          <a:ln w="12700">
+            <a:solidFill>
+              <a:srgbClr val="B45309"/>
+            </a:solidFill>
+            <a:prstDash val="solid"/>
+          </a:ln>
+        </p:spPr>
+      </p:sp>
+      <p:sp>
+        <p:nvSpPr>
+          <p:cNvPr id="19" name="Shape 17"/>
+          <p:cNvSpPr/>
+          <p:nvPr/>
+        </p:nvSpPr>
+        <p:spPr>
+          <a:xfrm>
+            <a:off x="9342831" y="91440"/>
+            <a:ext cx="27432" cy="274320"/>
+          </a:xfrm>
+          <a:prstGeom prst="rect">
+            <a:avLst/>
+          </a:prstGeom>
+          <a:solidFill>
+            <a:srgbClr val="B45309"/>
+          </a:solidFill>
+          <a:ln w="12700">
+            <a:solidFill>
+              <a:srgbClr val="B45309"/>
+            </a:solidFill>
+            <a:prstDash val="solid"/>
+          </a:ln>
+        </p:spPr>
+      </p:sp>
+      <p:pic>
+        <p:nvPicPr>
+          <p:cNvPr id="20" name="Image 0" descr="preencoded.png">    </p:cNvPr>
+          <p:cNvPicPr>
+            <a:picLocks noChangeAspect="1"/>
+          </p:cNvPicPr>
+          <p:nvPr/>
+        </p:nvPicPr>
+        <p:blipFill>
+          <a:blip r:embed="rId1"/>
+          <a:stretch>
+            <a:fillRect/>
+          </a:stretch>
+        </p:blipFill>
+        <p:spPr>
+          <a:xfrm>
+            <a:off x="9415983" y="128016"/>
+            <a:ext cx="201168" cy="201168"/>
+          </a:xfrm>
+          <a:prstGeom prst="rect">
+            <a:avLst/>
+          </a:prstGeom>
+        </p:spPr>
+      </p:pic>
+      <p:sp>
+        <p:nvSpPr>
+          <p:cNvPr id="21" name="Text 18"/>
+          <p:cNvSpPr txBox="1"/>
+          <p:nvPr/>
+        </p:nvSpPr>
+        <p:spPr>
+          <a:xfrm>
+            <a:off x="9672015" y="91440"/>
+            <a:ext cx="1934464" cy="274320"/>
+          </a:xfrm>
+          <a:prstGeom prst="rect">
+            <a:avLst/>
+          </a:prstGeom>
+          <a:noFill/>
+          <a:ln/>
+        </p:spPr>
+        <p:txBody>
+          <a:bodyPr wrap="square" lIns="0" tIns="0" rIns="0" bIns="0" rtlCol="0" anchor="ctr"/>
+          <a:lstStyle/>
+          <a:p>
+            <a:pPr indent="0" marL="0">
+              <a:buNone/>
+            </a:pPr>
+            <a:r>
+              <a:rPr lang="en-US" sz="1100" b="1" dirty="0">
+                <a:solidFill>
+                  <a:srgbClr val="92400E"/>
+                </a:solidFill>
+                <a:latin typeface="Calibri" pitchFamily="34" charset="0"/>
+                <a:ea typeface="Calibri" pitchFamily="34" charset="-122"/>
+                <a:cs typeface="Calibri" pitchFamily="34" charset="-120"/>
+              </a:rPr>
+              <a:t>USE NOW</a:t>
+            </a:r>
+            <a:pPr indent="0" marL="0">
+              <a:buNone/>
+            </a:pPr>
+            <a:r>
+              <a:rPr lang="en-US" sz="1100" dirty="0">
+                <a:solidFill>
+                  <a:srgbClr val="92400E"/>
+                </a:solidFill>
+                <a:latin typeface="Calibri" pitchFamily="34" charset="0"/>
+                <a:ea typeface="Calibri" pitchFamily="34" charset="-122"/>
+                <a:cs typeface="Calibri" pitchFamily="34" charset="-120"/>
+              </a:rPr>
+              <a:t> · the PRG32 tools</a:t>
+            </a:r>
+            <a:endParaRPr lang="en-US" sz="1100" dirty="0"/>
+          </a:p>
+        </p:txBody>
+      </p:sp>
+      <p:sp>
+        <p:nvSpPr>
           <p:cNvPr id="25" name="Slide Number Placeholder 0"/>
           <p:cNvSpPr>
             <a:spLocks noGrp="1"/>
@@ -7528,6 +8422,158 @@
       </p:sp>
       <p:sp>
         <p:nvSpPr>
+          <p:cNvPr id="17" name="Shape 15"/>
+          <p:cNvSpPr/>
+          <p:nvPr/>
+        </p:nvSpPr>
+        <p:spPr>
+          <a:xfrm>
+            <a:off x="9287967" y="91440"/>
+            <a:ext cx="2355088" cy="274320"/>
+          </a:xfrm>
+          <a:prstGeom prst="rect">
+            <a:avLst/>
+          </a:prstGeom>
+          <a:solidFill>
+            <a:srgbClr val="FEF3C7"/>
+          </a:solidFill>
+          <a:ln w="12700">
+            <a:solidFill>
+              <a:srgbClr val="B45309"/>
+            </a:solidFill>
+            <a:prstDash val="solid"/>
+          </a:ln>
+        </p:spPr>
+      </p:sp>
+      <p:sp>
+        <p:nvSpPr>
+          <p:cNvPr id="18" name="Shape 16"/>
+          <p:cNvSpPr/>
+          <p:nvPr/>
+        </p:nvSpPr>
+        <p:spPr>
+          <a:xfrm>
+            <a:off x="9287967" y="91440"/>
+            <a:ext cx="27432" cy="274320"/>
+          </a:xfrm>
+          <a:prstGeom prst="rect">
+            <a:avLst/>
+          </a:prstGeom>
+          <a:solidFill>
+            <a:srgbClr val="B45309"/>
+          </a:solidFill>
+          <a:ln w="12700">
+            <a:solidFill>
+              <a:srgbClr val="B45309"/>
+            </a:solidFill>
+            <a:prstDash val="solid"/>
+          </a:ln>
+        </p:spPr>
+      </p:sp>
+      <p:sp>
+        <p:nvSpPr>
+          <p:cNvPr id="19" name="Shape 17"/>
+          <p:cNvSpPr/>
+          <p:nvPr/>
+        </p:nvSpPr>
+        <p:spPr>
+          <a:xfrm>
+            <a:off x="9342831" y="91440"/>
+            <a:ext cx="27432" cy="274320"/>
+          </a:xfrm>
+          <a:prstGeom prst="rect">
+            <a:avLst/>
+          </a:prstGeom>
+          <a:solidFill>
+            <a:srgbClr val="B45309"/>
+          </a:solidFill>
+          <a:ln w="12700">
+            <a:solidFill>
+              <a:srgbClr val="B45309"/>
+            </a:solidFill>
+            <a:prstDash val="solid"/>
+          </a:ln>
+        </p:spPr>
+      </p:sp>
+      <p:pic>
+        <p:nvPicPr>
+          <p:cNvPr id="20" name="Image 0" descr="preencoded.png">    </p:cNvPr>
+          <p:cNvPicPr>
+            <a:picLocks noChangeAspect="1"/>
+          </p:cNvPicPr>
+          <p:nvPr/>
+        </p:nvPicPr>
+        <p:blipFill>
+          <a:blip r:embed="rId1"/>
+          <a:stretch>
+            <a:fillRect/>
+          </a:stretch>
+        </p:blipFill>
+        <p:spPr>
+          <a:xfrm>
+            <a:off x="9415983" y="128016"/>
+            <a:ext cx="201168" cy="201168"/>
+          </a:xfrm>
+          <a:prstGeom prst="rect">
+            <a:avLst/>
+          </a:prstGeom>
+        </p:spPr>
+      </p:pic>
+      <p:sp>
+        <p:nvSpPr>
+          <p:cNvPr id="21" name="Text 18"/>
+          <p:cNvSpPr txBox="1"/>
+          <p:nvPr/>
+        </p:nvSpPr>
+        <p:spPr>
+          <a:xfrm>
+            <a:off x="9672015" y="91440"/>
+            <a:ext cx="1934464" cy="274320"/>
+          </a:xfrm>
+          <a:prstGeom prst="rect">
+            <a:avLst/>
+          </a:prstGeom>
+          <a:noFill/>
+          <a:ln/>
+        </p:spPr>
+        <p:txBody>
+          <a:bodyPr wrap="square" lIns="0" tIns="0" rIns="0" bIns="0" rtlCol="0" anchor="ctr"/>
+          <a:lstStyle/>
+          <a:p>
+            <a:pPr indent="0" marL="0">
+              <a:buNone/>
+            </a:pPr>
+            <a:r>
+              <a:rPr lang="en-US" sz="1100" b="1" dirty="0">
+                <a:solidFill>
+                  <a:srgbClr val="92400E"/>
+                </a:solidFill>
+                <a:latin typeface="Calibri" pitchFamily="34" charset="0"/>
+                <a:ea typeface="Calibri" pitchFamily="34" charset="-122"/>
+                <a:cs typeface="Calibri" pitchFamily="34" charset="-120"/>
+              </a:rPr>
+              <a:t>USE NOW</a:t>
+            </a:r>
+            <a:pPr indent="0" marL="0">
+              <a:buNone/>
+            </a:pPr>
+            <a:r>
+              <a:rPr lang="en-US" sz="1100" dirty="0">
+                <a:solidFill>
+                  <a:srgbClr val="92400E"/>
+                </a:solidFill>
+                <a:latin typeface="Calibri" pitchFamily="34" charset="0"/>
+                <a:ea typeface="Calibri" pitchFamily="34" charset="-122"/>
+                <a:cs typeface="Calibri" pitchFamily="34" charset="-120"/>
+              </a:rPr>
+              <a:t> · the PRG32 tools</a:t>
+            </a:r>
+            <a:endParaRPr lang="en-US" sz="1100" dirty="0"/>
+          </a:p>
+        </p:txBody>
+      </p:sp>
+      <p:sp>
+        <p:nvSpPr>
           <p:cNvPr id="25" name="Slide Number Placeholder 0"/>
           <p:cNvSpPr>
             <a:spLocks noGrp="1"/>
@@ -8296,6 +9342,349 @@
       </p:sp>
       <p:sp>
         <p:nvSpPr>
+          <p:cNvPr id="17" name="Shape 15"/>
+          <p:cNvSpPr/>
+          <p:nvPr/>
+        </p:nvSpPr>
+        <p:spPr>
+          <a:xfrm>
+            <a:off x="6495364" y="91440"/>
+            <a:ext cx="5147691" cy="274320"/>
+          </a:xfrm>
+          <a:prstGeom prst="rect">
+            <a:avLst/>
+          </a:prstGeom>
+          <a:solidFill>
+            <a:srgbClr val="F3E8FF"/>
+          </a:solidFill>
+          <a:ln w="12700">
+            <a:solidFill>
+              <a:srgbClr val="7E22CE"/>
+            </a:solidFill>
+            <a:prstDash val="dash"/>
+          </a:ln>
+        </p:spPr>
+      </p:sp>
+      <p:sp>
+        <p:nvSpPr>
+          <p:cNvPr id="18" name="Shape 16"/>
+          <p:cNvSpPr/>
+          <p:nvPr/>
+        </p:nvSpPr>
+        <p:spPr>
+          <a:xfrm>
+            <a:off x="6522796" y="128016"/>
+            <a:ext cx="45720" cy="45720"/>
+          </a:xfrm>
+          <a:prstGeom prst="rect">
+            <a:avLst/>
+          </a:prstGeom>
+          <a:solidFill>
+            <a:srgbClr val="7E22CE"/>
+          </a:solidFill>
+          <a:ln w="12700">
+            <a:solidFill>
+              <a:srgbClr val="7E22CE"/>
+            </a:solidFill>
+            <a:prstDash val="solid"/>
+          </a:ln>
+        </p:spPr>
+      </p:sp>
+      <p:sp>
+        <p:nvSpPr>
+          <p:cNvPr id="19" name="Shape 17"/>
+          <p:cNvSpPr/>
+          <p:nvPr/>
+        </p:nvSpPr>
+        <p:spPr>
+          <a:xfrm>
+            <a:off x="6522796" y="205740"/>
+            <a:ext cx="45720" cy="45720"/>
+          </a:xfrm>
+          <a:prstGeom prst="rect">
+            <a:avLst/>
+          </a:prstGeom>
+          <a:solidFill>
+            <a:srgbClr val="7E22CE"/>
+          </a:solidFill>
+          <a:ln w="12700">
+            <a:solidFill>
+              <a:srgbClr val="7E22CE"/>
+            </a:solidFill>
+            <a:prstDash val="solid"/>
+          </a:ln>
+        </p:spPr>
+      </p:sp>
+      <p:sp>
+        <p:nvSpPr>
+          <p:cNvPr id="20" name="Shape 18"/>
+          <p:cNvSpPr/>
+          <p:nvPr/>
+        </p:nvSpPr>
+        <p:spPr>
+          <a:xfrm>
+            <a:off x="6522796" y="283464"/>
+            <a:ext cx="45720" cy="45720"/>
+          </a:xfrm>
+          <a:prstGeom prst="rect">
+            <a:avLst/>
+          </a:prstGeom>
+          <a:solidFill>
+            <a:srgbClr val="7E22CE"/>
+          </a:solidFill>
+          <a:ln w="12700">
+            <a:solidFill>
+              <a:srgbClr val="7E22CE"/>
+            </a:solidFill>
+            <a:prstDash val="solid"/>
+          </a:ln>
+        </p:spPr>
+      </p:sp>
+      <p:pic>
+        <p:nvPicPr>
+          <p:cNvPr id="21" name="Image 0" descr="preencoded.png">    </p:cNvPr>
+          <p:cNvPicPr>
+            <a:picLocks noChangeAspect="1"/>
+          </p:cNvPicPr>
+          <p:nvPr/>
+        </p:nvPicPr>
+        <p:blipFill>
+          <a:blip r:embed="rId1"/>
+          <a:stretch>
+            <a:fillRect/>
+          </a:stretch>
+        </p:blipFill>
+        <p:spPr>
+          <a:xfrm>
+            <a:off x="6623380" y="128016"/>
+            <a:ext cx="201168" cy="201168"/>
+          </a:xfrm>
+          <a:prstGeom prst="rect">
+            <a:avLst/>
+          </a:prstGeom>
+        </p:spPr>
+      </p:pic>
+      <p:sp>
+        <p:nvSpPr>
+          <p:cNvPr id="22" name="Text 19"/>
+          <p:cNvSpPr txBox="1"/>
+          <p:nvPr/>
+        </p:nvSpPr>
+        <p:spPr>
+          <a:xfrm>
+            <a:off x="6879412" y="91440"/>
+            <a:ext cx="4727067" cy="274320"/>
+          </a:xfrm>
+          <a:prstGeom prst="rect">
+            <a:avLst/>
+          </a:prstGeom>
+          <a:noFill/>
+          <a:ln/>
+        </p:spPr>
+        <p:txBody>
+          <a:bodyPr wrap="square" lIns="0" tIns="0" rIns="0" bIns="0" rtlCol="0" anchor="ctr"/>
+          <a:lstStyle/>
+          <a:p>
+            <a:pPr indent="0" marL="0">
+              <a:buNone/>
+            </a:pPr>
+            <a:r>
+              <a:rPr lang="en-US" sz="1100" b="1" dirty="0">
+                <a:solidFill>
+                  <a:srgbClr val="6B21A8"/>
+                </a:solidFill>
+                <a:latin typeface="Calibri" pitchFamily="34" charset="0"/>
+                <a:ea typeface="Calibri" pitchFamily="34" charset="-122"/>
+                <a:cs typeface="Calibri" pitchFamily="34" charset="-120"/>
+              </a:rPr>
+              <a:t>UNDERSTAND LATER</a:t>
+            </a:r>
+            <a:pPr indent="0" marL="0">
+              <a:buNone/>
+            </a:pPr>
+            <a:r>
+              <a:rPr lang="en-US" sz="1100" dirty="0">
+                <a:solidFill>
+                  <a:srgbClr val="6B21A8"/>
+                </a:solidFill>
+                <a:latin typeface="Calibri" pitchFamily="34" charset="0"/>
+                <a:ea typeface="Calibri" pitchFamily="34" charset="-122"/>
+                <a:cs typeface="Calibri" pitchFamily="34" charset="-120"/>
+              </a:rPr>
+              <a:t> · the init, update, draw contract</a:t>
+            </a:r>
+            <a:pPr indent="0" marL="0">
+              <a:buNone/>
+            </a:pPr>
+            <a:r>
+              <a:rPr lang="en-US" sz="1100" b="1" dirty="0">
+                <a:solidFill>
+                  <a:srgbClr val="6B21A8"/>
+                </a:solidFill>
+                <a:latin typeface="Calibri" pitchFamily="34" charset="0"/>
+                <a:ea typeface="Calibri" pitchFamily="34" charset="-122"/>
+                <a:cs typeface="Calibri" pitchFamily="34" charset="-120"/>
+              </a:rPr>
+              <a:t> → Lecture 02</a:t>
+            </a:r>
+            <a:endParaRPr lang="en-US" sz="1100" dirty="0"/>
+          </a:p>
+        </p:txBody>
+      </p:sp>
+      <p:sp>
+        <p:nvSpPr>
+          <p:cNvPr id="23" name="Shape 20"/>
+          <p:cNvSpPr/>
+          <p:nvPr/>
+        </p:nvSpPr>
+        <p:spPr>
+          <a:xfrm>
+            <a:off x="4030548" y="91440"/>
+            <a:ext cx="2355088" cy="274320"/>
+          </a:xfrm>
+          <a:prstGeom prst="rect">
+            <a:avLst/>
+          </a:prstGeom>
+          <a:solidFill>
+            <a:srgbClr val="FEF3C7"/>
+          </a:solidFill>
+          <a:ln w="12700">
+            <a:solidFill>
+              <a:srgbClr val="B45309"/>
+            </a:solidFill>
+            <a:prstDash val="solid"/>
+          </a:ln>
+        </p:spPr>
+      </p:sp>
+      <p:sp>
+        <p:nvSpPr>
+          <p:cNvPr id="24" name="Shape 21"/>
+          <p:cNvSpPr/>
+          <p:nvPr/>
+        </p:nvSpPr>
+        <p:spPr>
+          <a:xfrm>
+            <a:off x="4030548" y="91440"/>
+            <a:ext cx="27432" cy="274320"/>
+          </a:xfrm>
+          <a:prstGeom prst="rect">
+            <a:avLst/>
+          </a:prstGeom>
+          <a:solidFill>
+            <a:srgbClr val="B45309"/>
+          </a:solidFill>
+          <a:ln w="12700">
+            <a:solidFill>
+              <a:srgbClr val="B45309"/>
+            </a:solidFill>
+            <a:prstDash val="solid"/>
+          </a:ln>
+        </p:spPr>
+      </p:sp>
+      <p:sp>
+        <p:nvSpPr>
+          <p:cNvPr id="25" name="Shape 22"/>
+          <p:cNvSpPr/>
+          <p:nvPr/>
+        </p:nvSpPr>
+        <p:spPr>
+          <a:xfrm>
+            <a:off x="4085412" y="91440"/>
+            <a:ext cx="27432" cy="274320"/>
+          </a:xfrm>
+          <a:prstGeom prst="rect">
+            <a:avLst/>
+          </a:prstGeom>
+          <a:solidFill>
+            <a:srgbClr val="B45309"/>
+          </a:solidFill>
+          <a:ln w="12700">
+            <a:solidFill>
+              <a:srgbClr val="B45309"/>
+            </a:solidFill>
+            <a:prstDash val="solid"/>
+          </a:ln>
+        </p:spPr>
+      </p:sp>
+      <p:pic>
+        <p:nvPicPr>
+          <p:cNvPr id="26" name="Image 1" descr="preencoded.png">    </p:cNvPr>
+          <p:cNvPicPr>
+            <a:picLocks noChangeAspect="1"/>
+          </p:cNvPicPr>
+          <p:nvPr/>
+        </p:nvPicPr>
+        <p:blipFill>
+          <a:blip r:embed="rId2"/>
+          <a:stretch>
+            <a:fillRect/>
+          </a:stretch>
+        </p:blipFill>
+        <p:spPr>
+          <a:xfrm>
+            <a:off x="4158564" y="128016"/>
+            <a:ext cx="201168" cy="201168"/>
+          </a:xfrm>
+          <a:prstGeom prst="rect">
+            <a:avLst/>
+          </a:prstGeom>
+        </p:spPr>
+      </p:pic>
+      <p:sp>
+        <p:nvSpPr>
+          <p:cNvPr id="27" name="Text 23"/>
+          <p:cNvSpPr txBox="1"/>
+          <p:nvPr/>
+        </p:nvSpPr>
+        <p:spPr>
+          <a:xfrm>
+            <a:off x="4414596" y="91440"/>
+            <a:ext cx="1934464" cy="274320"/>
+          </a:xfrm>
+          <a:prstGeom prst="rect">
+            <a:avLst/>
+          </a:prstGeom>
+          <a:noFill/>
+          <a:ln/>
+        </p:spPr>
+        <p:txBody>
+          <a:bodyPr wrap="square" lIns="0" tIns="0" rIns="0" bIns="0" rtlCol="0" anchor="ctr"/>
+          <a:lstStyle/>
+          <a:p>
+            <a:pPr indent="0" marL="0">
+              <a:buNone/>
+            </a:pPr>
+            <a:r>
+              <a:rPr lang="en-US" sz="1100" b="1" dirty="0">
+                <a:solidFill>
+                  <a:srgbClr val="92400E"/>
+                </a:solidFill>
+                <a:latin typeface="Calibri" pitchFamily="34" charset="0"/>
+                <a:ea typeface="Calibri" pitchFamily="34" charset="-122"/>
+                <a:cs typeface="Calibri" pitchFamily="34" charset="-120"/>
+              </a:rPr>
+              <a:t>USE NOW</a:t>
+            </a:r>
+            <a:pPr indent="0" marL="0">
+              <a:buNone/>
+            </a:pPr>
+            <a:r>
+              <a:rPr lang="en-US" sz="1100" dirty="0">
+                <a:solidFill>
+                  <a:srgbClr val="92400E"/>
+                </a:solidFill>
+                <a:latin typeface="Calibri" pitchFamily="34" charset="0"/>
+                <a:ea typeface="Calibri" pitchFamily="34" charset="-122"/>
+                <a:cs typeface="Calibri" pitchFamily="34" charset="-120"/>
+              </a:rPr>
+              <a:t> · the PRG32 tools</a:t>
+            </a:r>
+            <a:endParaRPr lang="en-US" sz="1100" dirty="0"/>
+          </a:p>
+        </p:txBody>
+      </p:sp>
+      <p:sp>
+        <p:nvSpPr>
           <p:cNvPr id="25" name="Slide Number Placeholder 0"/>
           <p:cNvSpPr>
             <a:spLocks noGrp="1"/>
@@ -9115,6 +10504,158 @@
       </p:sp>
       <p:sp>
         <p:nvSpPr>
+          <p:cNvPr id="17" name="Shape 15"/>
+          <p:cNvSpPr/>
+          <p:nvPr/>
+        </p:nvSpPr>
+        <p:spPr>
+          <a:xfrm>
+            <a:off x="9287967" y="91440"/>
+            <a:ext cx="2355088" cy="274320"/>
+          </a:xfrm>
+          <a:prstGeom prst="rect">
+            <a:avLst/>
+          </a:prstGeom>
+          <a:solidFill>
+            <a:srgbClr val="FEF3C7"/>
+          </a:solidFill>
+          <a:ln w="12700">
+            <a:solidFill>
+              <a:srgbClr val="B45309"/>
+            </a:solidFill>
+            <a:prstDash val="solid"/>
+          </a:ln>
+        </p:spPr>
+      </p:sp>
+      <p:sp>
+        <p:nvSpPr>
+          <p:cNvPr id="18" name="Shape 16"/>
+          <p:cNvSpPr/>
+          <p:nvPr/>
+        </p:nvSpPr>
+        <p:spPr>
+          <a:xfrm>
+            <a:off x="9287967" y="91440"/>
+            <a:ext cx="27432" cy="274320"/>
+          </a:xfrm>
+          <a:prstGeom prst="rect">
+            <a:avLst/>
+          </a:prstGeom>
+          <a:solidFill>
+            <a:srgbClr val="B45309"/>
+          </a:solidFill>
+          <a:ln w="12700">
+            <a:solidFill>
+              <a:srgbClr val="B45309"/>
+            </a:solidFill>
+            <a:prstDash val="solid"/>
+          </a:ln>
+        </p:spPr>
+      </p:sp>
+      <p:sp>
+        <p:nvSpPr>
+          <p:cNvPr id="19" name="Shape 17"/>
+          <p:cNvSpPr/>
+          <p:nvPr/>
+        </p:nvSpPr>
+        <p:spPr>
+          <a:xfrm>
+            <a:off x="9342831" y="91440"/>
+            <a:ext cx="27432" cy="274320"/>
+          </a:xfrm>
+          <a:prstGeom prst="rect">
+            <a:avLst/>
+          </a:prstGeom>
+          <a:solidFill>
+            <a:srgbClr val="B45309"/>
+          </a:solidFill>
+          <a:ln w="12700">
+            <a:solidFill>
+              <a:srgbClr val="B45309"/>
+            </a:solidFill>
+            <a:prstDash val="solid"/>
+          </a:ln>
+        </p:spPr>
+      </p:sp>
+      <p:pic>
+        <p:nvPicPr>
+          <p:cNvPr id="20" name="Image 0" descr="preencoded.png">    </p:cNvPr>
+          <p:cNvPicPr>
+            <a:picLocks noChangeAspect="1"/>
+          </p:cNvPicPr>
+          <p:nvPr/>
+        </p:nvPicPr>
+        <p:blipFill>
+          <a:blip r:embed="rId1"/>
+          <a:stretch>
+            <a:fillRect/>
+          </a:stretch>
+        </p:blipFill>
+        <p:spPr>
+          <a:xfrm>
+            <a:off x="9415983" y="128016"/>
+            <a:ext cx="201168" cy="201168"/>
+          </a:xfrm>
+          <a:prstGeom prst="rect">
+            <a:avLst/>
+          </a:prstGeom>
+        </p:spPr>
+      </p:pic>
+      <p:sp>
+        <p:nvSpPr>
+          <p:cNvPr id="21" name="Text 18"/>
+          <p:cNvSpPr txBox="1"/>
+          <p:nvPr/>
+        </p:nvSpPr>
+        <p:spPr>
+          <a:xfrm>
+            <a:off x="9672015" y="91440"/>
+            <a:ext cx="1934464" cy="274320"/>
+          </a:xfrm>
+          <a:prstGeom prst="rect">
+            <a:avLst/>
+          </a:prstGeom>
+          <a:noFill/>
+          <a:ln/>
+        </p:spPr>
+        <p:txBody>
+          <a:bodyPr wrap="square" lIns="0" tIns="0" rIns="0" bIns="0" rtlCol="0" anchor="ctr"/>
+          <a:lstStyle/>
+          <a:p>
+            <a:pPr indent="0" marL="0">
+              <a:buNone/>
+            </a:pPr>
+            <a:r>
+              <a:rPr lang="en-US" sz="1100" b="1" dirty="0">
+                <a:solidFill>
+                  <a:srgbClr val="92400E"/>
+                </a:solidFill>
+                <a:latin typeface="Calibri" pitchFamily="34" charset="0"/>
+                <a:ea typeface="Calibri" pitchFamily="34" charset="-122"/>
+                <a:cs typeface="Calibri" pitchFamily="34" charset="-120"/>
+              </a:rPr>
+              <a:t>USE NOW</a:t>
+            </a:r>
+            <a:pPr indent="0" marL="0">
+              <a:buNone/>
+            </a:pPr>
+            <a:r>
+              <a:rPr lang="en-US" sz="1100" dirty="0">
+                <a:solidFill>
+                  <a:srgbClr val="92400E"/>
+                </a:solidFill>
+                <a:latin typeface="Calibri" pitchFamily="34" charset="0"/>
+                <a:ea typeface="Calibri" pitchFamily="34" charset="-122"/>
+                <a:cs typeface="Calibri" pitchFamily="34" charset="-120"/>
+              </a:rPr>
+              <a:t> · the PRG32 tools</a:t>
+            </a:r>
+            <a:endParaRPr lang="en-US" sz="1100" dirty="0"/>
+          </a:p>
+        </p:txBody>
+      </p:sp>
+      <p:sp>
+        <p:nvSpPr>
           <p:cNvPr id="25" name="Slide Number Placeholder 0"/>
           <p:cNvSpPr>
             <a:spLocks noGrp="1"/>
@@ -9763,6 +11304,349 @@
       </p:sp>
       <p:sp>
         <p:nvSpPr>
+          <p:cNvPr id="15" name="Shape 13"/>
+          <p:cNvSpPr/>
+          <p:nvPr/>
+        </p:nvSpPr>
+        <p:spPr>
+          <a:xfrm>
+            <a:off x="7939862" y="91440"/>
+            <a:ext cx="3703193" cy="274320"/>
+          </a:xfrm>
+          <a:prstGeom prst="rect">
+            <a:avLst/>
+          </a:prstGeom>
+          <a:solidFill>
+            <a:srgbClr val="F3E8FF"/>
+          </a:solidFill>
+          <a:ln w="12700">
+            <a:solidFill>
+              <a:srgbClr val="7E22CE"/>
+            </a:solidFill>
+            <a:prstDash val="dash"/>
+          </a:ln>
+        </p:spPr>
+      </p:sp>
+      <p:sp>
+        <p:nvSpPr>
+          <p:cNvPr id="16" name="Shape 14"/>
+          <p:cNvSpPr/>
+          <p:nvPr/>
+        </p:nvSpPr>
+        <p:spPr>
+          <a:xfrm>
+            <a:off x="7967294" y="128016"/>
+            <a:ext cx="45720" cy="45720"/>
+          </a:xfrm>
+          <a:prstGeom prst="rect">
+            <a:avLst/>
+          </a:prstGeom>
+          <a:solidFill>
+            <a:srgbClr val="7E22CE"/>
+          </a:solidFill>
+          <a:ln w="12700">
+            <a:solidFill>
+              <a:srgbClr val="7E22CE"/>
+            </a:solidFill>
+            <a:prstDash val="solid"/>
+          </a:ln>
+        </p:spPr>
+      </p:sp>
+      <p:sp>
+        <p:nvSpPr>
+          <p:cNvPr id="17" name="Shape 15"/>
+          <p:cNvSpPr/>
+          <p:nvPr/>
+        </p:nvSpPr>
+        <p:spPr>
+          <a:xfrm>
+            <a:off x="7967294" y="205740"/>
+            <a:ext cx="45720" cy="45720"/>
+          </a:xfrm>
+          <a:prstGeom prst="rect">
+            <a:avLst/>
+          </a:prstGeom>
+          <a:solidFill>
+            <a:srgbClr val="7E22CE"/>
+          </a:solidFill>
+          <a:ln w="12700">
+            <a:solidFill>
+              <a:srgbClr val="7E22CE"/>
+            </a:solidFill>
+            <a:prstDash val="solid"/>
+          </a:ln>
+        </p:spPr>
+      </p:sp>
+      <p:sp>
+        <p:nvSpPr>
+          <p:cNvPr id="18" name="Shape 16"/>
+          <p:cNvSpPr/>
+          <p:nvPr/>
+        </p:nvSpPr>
+        <p:spPr>
+          <a:xfrm>
+            <a:off x="7967294" y="283464"/>
+            <a:ext cx="45720" cy="45720"/>
+          </a:xfrm>
+          <a:prstGeom prst="rect">
+            <a:avLst/>
+          </a:prstGeom>
+          <a:solidFill>
+            <a:srgbClr val="7E22CE"/>
+          </a:solidFill>
+          <a:ln w="12700">
+            <a:solidFill>
+              <a:srgbClr val="7E22CE"/>
+            </a:solidFill>
+            <a:prstDash val="solid"/>
+          </a:ln>
+        </p:spPr>
+      </p:sp>
+      <p:pic>
+        <p:nvPicPr>
+          <p:cNvPr id="19" name="Image 0" descr="preencoded.png">    </p:cNvPr>
+          <p:cNvPicPr>
+            <a:picLocks noChangeAspect="1"/>
+          </p:cNvPicPr>
+          <p:nvPr/>
+        </p:nvPicPr>
+        <p:blipFill>
+          <a:blip r:embed="rId1"/>
+          <a:stretch>
+            <a:fillRect/>
+          </a:stretch>
+        </p:blipFill>
+        <p:spPr>
+          <a:xfrm>
+            <a:off x="8067878" y="128016"/>
+            <a:ext cx="201168" cy="201168"/>
+          </a:xfrm>
+          <a:prstGeom prst="rect">
+            <a:avLst/>
+          </a:prstGeom>
+        </p:spPr>
+      </p:pic>
+      <p:sp>
+        <p:nvSpPr>
+          <p:cNvPr id="20" name="Text 17"/>
+          <p:cNvSpPr txBox="1"/>
+          <p:nvPr/>
+        </p:nvSpPr>
+        <p:spPr>
+          <a:xfrm>
+            <a:off x="8323910" y="91440"/>
+            <a:ext cx="3282569" cy="274320"/>
+          </a:xfrm>
+          <a:prstGeom prst="rect">
+            <a:avLst/>
+          </a:prstGeom>
+          <a:noFill/>
+          <a:ln/>
+        </p:spPr>
+        <p:txBody>
+          <a:bodyPr wrap="square" lIns="0" tIns="0" rIns="0" bIns="0" rtlCol="0" anchor="ctr"/>
+          <a:lstStyle/>
+          <a:p>
+            <a:pPr indent="0" marL="0">
+              <a:buNone/>
+            </a:pPr>
+            <a:r>
+              <a:rPr lang="en-US" sz="1100" b="1" dirty="0">
+                <a:solidFill>
+                  <a:srgbClr val="6B21A8"/>
+                </a:solidFill>
+                <a:latin typeface="Calibri" pitchFamily="34" charset="0"/>
+                <a:ea typeface="Calibri" pitchFamily="34" charset="-122"/>
+                <a:cs typeface="Calibri" pitchFamily="34" charset="-120"/>
+              </a:rPr>
+              <a:t>UNDERSTAND LATER</a:t>
+            </a:r>
+            <a:pPr indent="0" marL="0">
+              <a:buNone/>
+            </a:pPr>
+            <a:r>
+              <a:rPr lang="en-US" sz="1100" dirty="0">
+                <a:solidFill>
+                  <a:srgbClr val="6B21A8"/>
+                </a:solidFill>
+                <a:latin typeface="Calibri" pitchFamily="34" charset="0"/>
+                <a:ea typeface="Calibri" pitchFamily="34" charset="-122"/>
+                <a:cs typeface="Calibri" pitchFamily="34" charset="-120"/>
+              </a:rPr>
+              <a:t> · registers</a:t>
+            </a:r>
+            <a:pPr indent="0" marL="0">
+              <a:buNone/>
+            </a:pPr>
+            <a:r>
+              <a:rPr lang="en-US" sz="1100" b="1" dirty="0">
+                <a:solidFill>
+                  <a:srgbClr val="6B21A8"/>
+                </a:solidFill>
+                <a:latin typeface="Calibri" pitchFamily="34" charset="0"/>
+                <a:ea typeface="Calibri" pitchFamily="34" charset="-122"/>
+                <a:cs typeface="Calibri" pitchFamily="34" charset="-120"/>
+              </a:rPr>
+              <a:t> → Lecture 02</a:t>
+            </a:r>
+            <a:endParaRPr lang="en-US" sz="1100" dirty="0"/>
+          </a:p>
+        </p:txBody>
+      </p:sp>
+      <p:sp>
+        <p:nvSpPr>
+          <p:cNvPr id="21" name="Shape 18"/>
+          <p:cNvSpPr/>
+          <p:nvPr/>
+        </p:nvSpPr>
+        <p:spPr>
+          <a:xfrm>
+            <a:off x="5081092" y="91440"/>
+            <a:ext cx="2749042" cy="274320"/>
+          </a:xfrm>
+          <a:prstGeom prst="rect">
+            <a:avLst/>
+          </a:prstGeom>
+          <a:solidFill>
+            <a:srgbClr val="FEF3C7"/>
+          </a:solidFill>
+          <a:ln w="12700">
+            <a:solidFill>
+              <a:srgbClr val="B45309"/>
+            </a:solidFill>
+            <a:prstDash val="solid"/>
+          </a:ln>
+        </p:spPr>
+      </p:sp>
+      <p:sp>
+        <p:nvSpPr>
+          <p:cNvPr id="22" name="Shape 19"/>
+          <p:cNvSpPr/>
+          <p:nvPr/>
+        </p:nvSpPr>
+        <p:spPr>
+          <a:xfrm>
+            <a:off x="5081092" y="91440"/>
+            <a:ext cx="27432" cy="274320"/>
+          </a:xfrm>
+          <a:prstGeom prst="rect">
+            <a:avLst/>
+          </a:prstGeom>
+          <a:solidFill>
+            <a:srgbClr val="B45309"/>
+          </a:solidFill>
+          <a:ln w="12700">
+            <a:solidFill>
+              <a:srgbClr val="B45309"/>
+            </a:solidFill>
+            <a:prstDash val="solid"/>
+          </a:ln>
+        </p:spPr>
+      </p:sp>
+      <p:sp>
+        <p:nvSpPr>
+          <p:cNvPr id="23" name="Shape 20"/>
+          <p:cNvSpPr/>
+          <p:nvPr/>
+        </p:nvSpPr>
+        <p:spPr>
+          <a:xfrm>
+            <a:off x="5135956" y="91440"/>
+            <a:ext cx="27432" cy="274320"/>
+          </a:xfrm>
+          <a:prstGeom prst="rect">
+            <a:avLst/>
+          </a:prstGeom>
+          <a:solidFill>
+            <a:srgbClr val="B45309"/>
+          </a:solidFill>
+          <a:ln w="12700">
+            <a:solidFill>
+              <a:srgbClr val="B45309"/>
+            </a:solidFill>
+            <a:prstDash val="solid"/>
+          </a:ln>
+        </p:spPr>
+      </p:sp>
+      <p:pic>
+        <p:nvPicPr>
+          <p:cNvPr id="24" name="Image 1" descr="preencoded.png">    </p:cNvPr>
+          <p:cNvPicPr>
+            <a:picLocks noChangeAspect="1"/>
+          </p:cNvPicPr>
+          <p:nvPr/>
+        </p:nvPicPr>
+        <p:blipFill>
+          <a:blip r:embed="rId2"/>
+          <a:stretch>
+            <a:fillRect/>
+          </a:stretch>
+        </p:blipFill>
+        <p:spPr>
+          <a:xfrm>
+            <a:off x="5209108" y="128016"/>
+            <a:ext cx="201168" cy="201168"/>
+          </a:xfrm>
+          <a:prstGeom prst="rect">
+            <a:avLst/>
+          </a:prstGeom>
+        </p:spPr>
+      </p:pic>
+      <p:sp>
+        <p:nvSpPr>
+          <p:cNvPr id="25" name="Text 21"/>
+          <p:cNvSpPr txBox="1"/>
+          <p:nvPr/>
+        </p:nvSpPr>
+        <p:spPr>
+          <a:xfrm>
+            <a:off x="5465140" y="91440"/>
+            <a:ext cx="2328418" cy="274320"/>
+          </a:xfrm>
+          <a:prstGeom prst="rect">
+            <a:avLst/>
+          </a:prstGeom>
+          <a:noFill/>
+          <a:ln/>
+        </p:spPr>
+        <p:txBody>
+          <a:bodyPr wrap="square" lIns="0" tIns="0" rIns="0" bIns="0" rtlCol="0" anchor="ctr"/>
+          <a:lstStyle/>
+          <a:p>
+            <a:pPr indent="0" marL="0">
+              <a:buNone/>
+            </a:pPr>
+            <a:r>
+              <a:rPr lang="en-US" sz="1100" b="1" dirty="0">
+                <a:solidFill>
+                  <a:srgbClr val="92400E"/>
+                </a:solidFill>
+                <a:latin typeface="Calibri" pitchFamily="34" charset="0"/>
+                <a:ea typeface="Calibri" pitchFamily="34" charset="-122"/>
+                <a:cs typeface="Calibri" pitchFamily="34" charset="-120"/>
+              </a:rPr>
+              <a:t>USE NOW</a:t>
+            </a:r>
+            <a:pPr indent="0" marL="0">
+              <a:buNone/>
+            </a:pPr>
+            <a:r>
+              <a:rPr lang="en-US" sz="1100" dirty="0">
+                <a:solidFill>
+                  <a:srgbClr val="92400E"/>
+                </a:solidFill>
+                <a:latin typeface="Calibri" pitchFamily="34" charset="0"/>
+                <a:ea typeface="Calibri" pitchFamily="34" charset="-122"/>
+                <a:cs typeface="Calibri" pitchFamily="34" charset="-120"/>
+              </a:rPr>
+              <a:t> · the PRG32-QT debugger</a:t>
+            </a:r>
+            <a:endParaRPr lang="en-US" sz="1100" dirty="0"/>
+          </a:p>
+        </p:txBody>
+      </p:sp>
+      <p:sp>
+        <p:nvSpPr>
           <p:cNvPr id="25" name="Slide Number Placeholder 0"/>
           <p:cNvSpPr>
             <a:spLocks noGrp="1"/>
@@ -10006,6 +11890,349 @@
       </p:sp>
       <p:sp>
         <p:nvSpPr>
+          <p:cNvPr id="7" name="Shape 4"/>
+          <p:cNvSpPr/>
+          <p:nvPr/>
+        </p:nvSpPr>
+        <p:spPr>
+          <a:xfrm>
+            <a:off x="7939862" y="91440"/>
+            <a:ext cx="3703193" cy="274320"/>
+          </a:xfrm>
+          <a:prstGeom prst="rect">
+            <a:avLst/>
+          </a:prstGeom>
+          <a:solidFill>
+            <a:srgbClr val="F3E8FF"/>
+          </a:solidFill>
+          <a:ln w="12700">
+            <a:solidFill>
+              <a:srgbClr val="7E22CE"/>
+            </a:solidFill>
+            <a:prstDash val="dash"/>
+          </a:ln>
+        </p:spPr>
+      </p:sp>
+      <p:sp>
+        <p:nvSpPr>
+          <p:cNvPr id="8" name="Shape 5"/>
+          <p:cNvSpPr/>
+          <p:nvPr/>
+        </p:nvSpPr>
+        <p:spPr>
+          <a:xfrm>
+            <a:off x="7967294" y="128016"/>
+            <a:ext cx="45720" cy="45720"/>
+          </a:xfrm>
+          <a:prstGeom prst="rect">
+            <a:avLst/>
+          </a:prstGeom>
+          <a:solidFill>
+            <a:srgbClr val="7E22CE"/>
+          </a:solidFill>
+          <a:ln w="12700">
+            <a:solidFill>
+              <a:srgbClr val="7E22CE"/>
+            </a:solidFill>
+            <a:prstDash val="solid"/>
+          </a:ln>
+        </p:spPr>
+      </p:sp>
+      <p:sp>
+        <p:nvSpPr>
+          <p:cNvPr id="9" name="Shape 6"/>
+          <p:cNvSpPr/>
+          <p:nvPr/>
+        </p:nvSpPr>
+        <p:spPr>
+          <a:xfrm>
+            <a:off x="7967294" y="205740"/>
+            <a:ext cx="45720" cy="45720"/>
+          </a:xfrm>
+          <a:prstGeom prst="rect">
+            <a:avLst/>
+          </a:prstGeom>
+          <a:solidFill>
+            <a:srgbClr val="7E22CE"/>
+          </a:solidFill>
+          <a:ln w="12700">
+            <a:solidFill>
+              <a:srgbClr val="7E22CE"/>
+            </a:solidFill>
+            <a:prstDash val="solid"/>
+          </a:ln>
+        </p:spPr>
+      </p:sp>
+      <p:sp>
+        <p:nvSpPr>
+          <p:cNvPr id="10" name="Shape 7"/>
+          <p:cNvSpPr/>
+          <p:nvPr/>
+        </p:nvSpPr>
+        <p:spPr>
+          <a:xfrm>
+            <a:off x="7967294" y="283464"/>
+            <a:ext cx="45720" cy="45720"/>
+          </a:xfrm>
+          <a:prstGeom prst="rect">
+            <a:avLst/>
+          </a:prstGeom>
+          <a:solidFill>
+            <a:srgbClr val="7E22CE"/>
+          </a:solidFill>
+          <a:ln w="12700">
+            <a:solidFill>
+              <a:srgbClr val="7E22CE"/>
+            </a:solidFill>
+            <a:prstDash val="solid"/>
+          </a:ln>
+        </p:spPr>
+      </p:sp>
+      <p:pic>
+        <p:nvPicPr>
+          <p:cNvPr id="11" name="Image 1" descr="preencoded.png">    </p:cNvPr>
+          <p:cNvPicPr>
+            <a:picLocks noChangeAspect="1"/>
+          </p:cNvPicPr>
+          <p:nvPr/>
+        </p:nvPicPr>
+        <p:blipFill>
+          <a:blip r:embed="rId2"/>
+          <a:stretch>
+            <a:fillRect/>
+          </a:stretch>
+        </p:blipFill>
+        <p:spPr>
+          <a:xfrm>
+            <a:off x="8067878" y="128016"/>
+            <a:ext cx="201168" cy="201168"/>
+          </a:xfrm>
+          <a:prstGeom prst="rect">
+            <a:avLst/>
+          </a:prstGeom>
+        </p:spPr>
+      </p:pic>
+      <p:sp>
+        <p:nvSpPr>
+          <p:cNvPr id="12" name="Text 8"/>
+          <p:cNvSpPr txBox="1"/>
+          <p:nvPr/>
+        </p:nvSpPr>
+        <p:spPr>
+          <a:xfrm>
+            <a:off x="8323910" y="91440"/>
+            <a:ext cx="3282569" cy="274320"/>
+          </a:xfrm>
+          <a:prstGeom prst="rect">
+            <a:avLst/>
+          </a:prstGeom>
+          <a:noFill/>
+          <a:ln/>
+        </p:spPr>
+        <p:txBody>
+          <a:bodyPr wrap="square" lIns="0" tIns="0" rIns="0" bIns="0" rtlCol="0" anchor="ctr"/>
+          <a:lstStyle/>
+          <a:p>
+            <a:pPr indent="0" marL="0">
+              <a:buNone/>
+            </a:pPr>
+            <a:r>
+              <a:rPr lang="en-US" sz="1100" b="1" dirty="0">
+                <a:solidFill>
+                  <a:srgbClr val="6B21A8"/>
+                </a:solidFill>
+                <a:latin typeface="Calibri" pitchFamily="34" charset="0"/>
+                <a:ea typeface="Calibri" pitchFamily="34" charset="-122"/>
+                <a:cs typeface="Calibri" pitchFamily="34" charset="-120"/>
+              </a:rPr>
+              <a:t>UNDERSTAND LATER</a:t>
+            </a:r>
+            <a:pPr indent="0" marL="0">
+              <a:buNone/>
+            </a:pPr>
+            <a:r>
+              <a:rPr lang="en-US" sz="1100" dirty="0">
+                <a:solidFill>
+                  <a:srgbClr val="6B21A8"/>
+                </a:solidFill>
+                <a:latin typeface="Calibri" pitchFamily="34" charset="0"/>
+                <a:ea typeface="Calibri" pitchFamily="34" charset="-122"/>
+                <a:cs typeface="Calibri" pitchFamily="34" charset="-120"/>
+              </a:rPr>
+              <a:t> · registers</a:t>
+            </a:r>
+            <a:pPr indent="0" marL="0">
+              <a:buNone/>
+            </a:pPr>
+            <a:r>
+              <a:rPr lang="en-US" sz="1100" b="1" dirty="0">
+                <a:solidFill>
+                  <a:srgbClr val="6B21A8"/>
+                </a:solidFill>
+                <a:latin typeface="Calibri" pitchFamily="34" charset="0"/>
+                <a:ea typeface="Calibri" pitchFamily="34" charset="-122"/>
+                <a:cs typeface="Calibri" pitchFamily="34" charset="-120"/>
+              </a:rPr>
+              <a:t> → Lecture 02</a:t>
+            </a:r>
+            <a:endParaRPr lang="en-US" sz="1100" dirty="0"/>
+          </a:p>
+        </p:txBody>
+      </p:sp>
+      <p:sp>
+        <p:nvSpPr>
+          <p:cNvPr id="13" name="Shape 9"/>
+          <p:cNvSpPr/>
+          <p:nvPr/>
+        </p:nvSpPr>
+        <p:spPr>
+          <a:xfrm>
+            <a:off x="5081092" y="91440"/>
+            <a:ext cx="2749042" cy="274320"/>
+          </a:xfrm>
+          <a:prstGeom prst="rect">
+            <a:avLst/>
+          </a:prstGeom>
+          <a:solidFill>
+            <a:srgbClr val="FEF3C7"/>
+          </a:solidFill>
+          <a:ln w="12700">
+            <a:solidFill>
+              <a:srgbClr val="B45309"/>
+            </a:solidFill>
+            <a:prstDash val="solid"/>
+          </a:ln>
+        </p:spPr>
+      </p:sp>
+      <p:sp>
+        <p:nvSpPr>
+          <p:cNvPr id="14" name="Shape 10"/>
+          <p:cNvSpPr/>
+          <p:nvPr/>
+        </p:nvSpPr>
+        <p:spPr>
+          <a:xfrm>
+            <a:off x="5081092" y="91440"/>
+            <a:ext cx="27432" cy="274320"/>
+          </a:xfrm>
+          <a:prstGeom prst="rect">
+            <a:avLst/>
+          </a:prstGeom>
+          <a:solidFill>
+            <a:srgbClr val="B45309"/>
+          </a:solidFill>
+          <a:ln w="12700">
+            <a:solidFill>
+              <a:srgbClr val="B45309"/>
+            </a:solidFill>
+            <a:prstDash val="solid"/>
+          </a:ln>
+        </p:spPr>
+      </p:sp>
+      <p:sp>
+        <p:nvSpPr>
+          <p:cNvPr id="15" name="Shape 11"/>
+          <p:cNvSpPr/>
+          <p:nvPr/>
+        </p:nvSpPr>
+        <p:spPr>
+          <a:xfrm>
+            <a:off x="5135956" y="91440"/>
+            <a:ext cx="27432" cy="274320"/>
+          </a:xfrm>
+          <a:prstGeom prst="rect">
+            <a:avLst/>
+          </a:prstGeom>
+          <a:solidFill>
+            <a:srgbClr val="B45309"/>
+          </a:solidFill>
+          <a:ln w="12700">
+            <a:solidFill>
+              <a:srgbClr val="B45309"/>
+            </a:solidFill>
+            <a:prstDash val="solid"/>
+          </a:ln>
+        </p:spPr>
+      </p:sp>
+      <p:pic>
+        <p:nvPicPr>
+          <p:cNvPr id="16" name="Image 2" descr="preencoded.png">    </p:cNvPr>
+          <p:cNvPicPr>
+            <a:picLocks noChangeAspect="1"/>
+          </p:cNvPicPr>
+          <p:nvPr/>
+        </p:nvPicPr>
+        <p:blipFill>
+          <a:blip r:embed="rId3"/>
+          <a:stretch>
+            <a:fillRect/>
+          </a:stretch>
+        </p:blipFill>
+        <p:spPr>
+          <a:xfrm>
+            <a:off x="5209108" y="128016"/>
+            <a:ext cx="201168" cy="201168"/>
+          </a:xfrm>
+          <a:prstGeom prst="rect">
+            <a:avLst/>
+          </a:prstGeom>
+        </p:spPr>
+      </p:pic>
+      <p:sp>
+        <p:nvSpPr>
+          <p:cNvPr id="17" name="Text 12"/>
+          <p:cNvSpPr txBox="1"/>
+          <p:nvPr/>
+        </p:nvSpPr>
+        <p:spPr>
+          <a:xfrm>
+            <a:off x="5465140" y="91440"/>
+            <a:ext cx="2328418" cy="274320"/>
+          </a:xfrm>
+          <a:prstGeom prst="rect">
+            <a:avLst/>
+          </a:prstGeom>
+          <a:noFill/>
+          <a:ln/>
+        </p:spPr>
+        <p:txBody>
+          <a:bodyPr wrap="square" lIns="0" tIns="0" rIns="0" bIns="0" rtlCol="0" anchor="ctr"/>
+          <a:lstStyle/>
+          <a:p>
+            <a:pPr indent="0" marL="0">
+              <a:buNone/>
+            </a:pPr>
+            <a:r>
+              <a:rPr lang="en-US" sz="1100" b="1" dirty="0">
+                <a:solidFill>
+                  <a:srgbClr val="92400E"/>
+                </a:solidFill>
+                <a:latin typeface="Calibri" pitchFamily="34" charset="0"/>
+                <a:ea typeface="Calibri" pitchFamily="34" charset="-122"/>
+                <a:cs typeface="Calibri" pitchFamily="34" charset="-120"/>
+              </a:rPr>
+              <a:t>USE NOW</a:t>
+            </a:r>
+            <a:pPr indent="0" marL="0">
+              <a:buNone/>
+            </a:pPr>
+            <a:r>
+              <a:rPr lang="en-US" sz="1100" dirty="0">
+                <a:solidFill>
+                  <a:srgbClr val="92400E"/>
+                </a:solidFill>
+                <a:latin typeface="Calibri" pitchFamily="34" charset="0"/>
+                <a:ea typeface="Calibri" pitchFamily="34" charset="-122"/>
+                <a:cs typeface="Calibri" pitchFamily="34" charset="-120"/>
+              </a:rPr>
+              <a:t> · the PRG32-QT debugger</a:t>
+            </a:r>
+            <a:endParaRPr lang="en-US" sz="1100" dirty="0"/>
+          </a:p>
+        </p:txBody>
+      </p:sp>
+      <p:sp>
+        <p:nvSpPr>
           <p:cNvPr id="25" name="Slide Number Placeholder 0"/>
           <p:cNvSpPr>
             <a:spLocks noGrp="1"/>
@@ -10870,6 +13097,158 @@
       </p:sp>
       <p:sp>
         <p:nvSpPr>
+          <p:cNvPr id="17" name="Shape 15"/>
+          <p:cNvSpPr/>
+          <p:nvPr/>
+        </p:nvSpPr>
+        <p:spPr>
+          <a:xfrm>
+            <a:off x="9287967" y="91440"/>
+            <a:ext cx="2355088" cy="274320"/>
+          </a:xfrm>
+          <a:prstGeom prst="rect">
+            <a:avLst/>
+          </a:prstGeom>
+          <a:solidFill>
+            <a:srgbClr val="FEF3C7"/>
+          </a:solidFill>
+          <a:ln w="12700">
+            <a:solidFill>
+              <a:srgbClr val="B45309"/>
+            </a:solidFill>
+            <a:prstDash val="solid"/>
+          </a:ln>
+        </p:spPr>
+      </p:sp>
+      <p:sp>
+        <p:nvSpPr>
+          <p:cNvPr id="18" name="Shape 16"/>
+          <p:cNvSpPr/>
+          <p:nvPr/>
+        </p:nvSpPr>
+        <p:spPr>
+          <a:xfrm>
+            <a:off x="9287967" y="91440"/>
+            <a:ext cx="27432" cy="274320"/>
+          </a:xfrm>
+          <a:prstGeom prst="rect">
+            <a:avLst/>
+          </a:prstGeom>
+          <a:solidFill>
+            <a:srgbClr val="B45309"/>
+          </a:solidFill>
+          <a:ln w="12700">
+            <a:solidFill>
+              <a:srgbClr val="B45309"/>
+            </a:solidFill>
+            <a:prstDash val="solid"/>
+          </a:ln>
+        </p:spPr>
+      </p:sp>
+      <p:sp>
+        <p:nvSpPr>
+          <p:cNvPr id="19" name="Shape 17"/>
+          <p:cNvSpPr/>
+          <p:nvPr/>
+        </p:nvSpPr>
+        <p:spPr>
+          <a:xfrm>
+            <a:off x="9342831" y="91440"/>
+            <a:ext cx="27432" cy="274320"/>
+          </a:xfrm>
+          <a:prstGeom prst="rect">
+            <a:avLst/>
+          </a:prstGeom>
+          <a:solidFill>
+            <a:srgbClr val="B45309"/>
+          </a:solidFill>
+          <a:ln w="12700">
+            <a:solidFill>
+              <a:srgbClr val="B45309"/>
+            </a:solidFill>
+            <a:prstDash val="solid"/>
+          </a:ln>
+        </p:spPr>
+      </p:sp>
+      <p:pic>
+        <p:nvPicPr>
+          <p:cNvPr id="20" name="Image 0" descr="preencoded.png">    </p:cNvPr>
+          <p:cNvPicPr>
+            <a:picLocks noChangeAspect="1"/>
+          </p:cNvPicPr>
+          <p:nvPr/>
+        </p:nvPicPr>
+        <p:blipFill>
+          <a:blip r:embed="rId1"/>
+          <a:stretch>
+            <a:fillRect/>
+          </a:stretch>
+        </p:blipFill>
+        <p:spPr>
+          <a:xfrm>
+            <a:off x="9415983" y="128016"/>
+            <a:ext cx="201168" cy="201168"/>
+          </a:xfrm>
+          <a:prstGeom prst="rect">
+            <a:avLst/>
+          </a:prstGeom>
+        </p:spPr>
+      </p:pic>
+      <p:sp>
+        <p:nvSpPr>
+          <p:cNvPr id="21" name="Text 18"/>
+          <p:cNvSpPr txBox="1"/>
+          <p:nvPr/>
+        </p:nvSpPr>
+        <p:spPr>
+          <a:xfrm>
+            <a:off x="9672015" y="91440"/>
+            <a:ext cx="1934464" cy="274320"/>
+          </a:xfrm>
+          <a:prstGeom prst="rect">
+            <a:avLst/>
+          </a:prstGeom>
+          <a:noFill/>
+          <a:ln/>
+        </p:spPr>
+        <p:txBody>
+          <a:bodyPr wrap="square" lIns="0" tIns="0" rIns="0" bIns="0" rtlCol="0" anchor="ctr"/>
+          <a:lstStyle/>
+          <a:p>
+            <a:pPr indent="0" marL="0">
+              <a:buNone/>
+            </a:pPr>
+            <a:r>
+              <a:rPr lang="en-US" sz="1100" b="1" dirty="0">
+                <a:solidFill>
+                  <a:srgbClr val="92400E"/>
+                </a:solidFill>
+                <a:latin typeface="Calibri" pitchFamily="34" charset="0"/>
+                <a:ea typeface="Calibri" pitchFamily="34" charset="-122"/>
+                <a:cs typeface="Calibri" pitchFamily="34" charset="-120"/>
+              </a:rPr>
+              <a:t>USE NOW</a:t>
+            </a:r>
+            <a:pPr indent="0" marL="0">
+              <a:buNone/>
+            </a:pPr>
+            <a:r>
+              <a:rPr lang="en-US" sz="1100" dirty="0">
+                <a:solidFill>
+                  <a:srgbClr val="92400E"/>
+                </a:solidFill>
+                <a:latin typeface="Calibri" pitchFamily="34" charset="0"/>
+                <a:ea typeface="Calibri" pitchFamily="34" charset="-122"/>
+                <a:cs typeface="Calibri" pitchFamily="34" charset="-120"/>
+              </a:rPr>
+              <a:t> · the PRG32 tools</a:t>
+            </a:r>
+            <a:endParaRPr lang="en-US" sz="1100" dirty="0"/>
+          </a:p>
+        </p:txBody>
+      </p:sp>
+      <p:sp>
+        <p:nvSpPr>
           <p:cNvPr id="25" name="Slide Number Placeholder 0"/>
           <p:cNvSpPr>
             <a:spLocks noGrp="1"/>
@@ -11672,6 +14051,158 @@
       </p:sp>
       <p:sp>
         <p:nvSpPr>
+          <p:cNvPr id="17" name="Shape 15"/>
+          <p:cNvSpPr/>
+          <p:nvPr/>
+        </p:nvSpPr>
+        <p:spPr>
+          <a:xfrm>
+            <a:off x="9287967" y="91440"/>
+            <a:ext cx="2355088" cy="274320"/>
+          </a:xfrm>
+          <a:prstGeom prst="rect">
+            <a:avLst/>
+          </a:prstGeom>
+          <a:solidFill>
+            <a:srgbClr val="FEF3C7"/>
+          </a:solidFill>
+          <a:ln w="12700">
+            <a:solidFill>
+              <a:srgbClr val="B45309"/>
+            </a:solidFill>
+            <a:prstDash val="solid"/>
+          </a:ln>
+        </p:spPr>
+      </p:sp>
+      <p:sp>
+        <p:nvSpPr>
+          <p:cNvPr id="18" name="Shape 16"/>
+          <p:cNvSpPr/>
+          <p:nvPr/>
+        </p:nvSpPr>
+        <p:spPr>
+          <a:xfrm>
+            <a:off x="9287967" y="91440"/>
+            <a:ext cx="27432" cy="274320"/>
+          </a:xfrm>
+          <a:prstGeom prst="rect">
+            <a:avLst/>
+          </a:prstGeom>
+          <a:solidFill>
+            <a:srgbClr val="B45309"/>
+          </a:solidFill>
+          <a:ln w="12700">
+            <a:solidFill>
+              <a:srgbClr val="B45309"/>
+            </a:solidFill>
+            <a:prstDash val="solid"/>
+          </a:ln>
+        </p:spPr>
+      </p:sp>
+      <p:sp>
+        <p:nvSpPr>
+          <p:cNvPr id="19" name="Shape 17"/>
+          <p:cNvSpPr/>
+          <p:nvPr/>
+        </p:nvSpPr>
+        <p:spPr>
+          <a:xfrm>
+            <a:off x="9342831" y="91440"/>
+            <a:ext cx="27432" cy="274320"/>
+          </a:xfrm>
+          <a:prstGeom prst="rect">
+            <a:avLst/>
+          </a:prstGeom>
+          <a:solidFill>
+            <a:srgbClr val="B45309"/>
+          </a:solidFill>
+          <a:ln w="12700">
+            <a:solidFill>
+              <a:srgbClr val="B45309"/>
+            </a:solidFill>
+            <a:prstDash val="solid"/>
+          </a:ln>
+        </p:spPr>
+      </p:sp>
+      <p:pic>
+        <p:nvPicPr>
+          <p:cNvPr id="20" name="Image 0" descr="preencoded.png">    </p:cNvPr>
+          <p:cNvPicPr>
+            <a:picLocks noChangeAspect="1"/>
+          </p:cNvPicPr>
+          <p:nvPr/>
+        </p:nvPicPr>
+        <p:blipFill>
+          <a:blip r:embed="rId1"/>
+          <a:stretch>
+            <a:fillRect/>
+          </a:stretch>
+        </p:blipFill>
+        <p:spPr>
+          <a:xfrm>
+            <a:off x="9415983" y="128016"/>
+            <a:ext cx="201168" cy="201168"/>
+          </a:xfrm>
+          <a:prstGeom prst="rect">
+            <a:avLst/>
+          </a:prstGeom>
+        </p:spPr>
+      </p:pic>
+      <p:sp>
+        <p:nvSpPr>
+          <p:cNvPr id="21" name="Text 18"/>
+          <p:cNvSpPr txBox="1"/>
+          <p:nvPr/>
+        </p:nvSpPr>
+        <p:spPr>
+          <a:xfrm>
+            <a:off x="9672015" y="91440"/>
+            <a:ext cx="1934464" cy="274320"/>
+          </a:xfrm>
+          <a:prstGeom prst="rect">
+            <a:avLst/>
+          </a:prstGeom>
+          <a:noFill/>
+          <a:ln/>
+        </p:spPr>
+        <p:txBody>
+          <a:bodyPr wrap="square" lIns="0" tIns="0" rIns="0" bIns="0" rtlCol="0" anchor="ctr"/>
+          <a:lstStyle/>
+          <a:p>
+            <a:pPr indent="0" marL="0">
+              <a:buNone/>
+            </a:pPr>
+            <a:r>
+              <a:rPr lang="en-US" sz="1100" b="1" dirty="0">
+                <a:solidFill>
+                  <a:srgbClr val="92400E"/>
+                </a:solidFill>
+                <a:latin typeface="Calibri" pitchFamily="34" charset="0"/>
+                <a:ea typeface="Calibri" pitchFamily="34" charset="-122"/>
+                <a:cs typeface="Calibri" pitchFamily="34" charset="-120"/>
+              </a:rPr>
+              <a:t>USE NOW</a:t>
+            </a:r>
+            <a:pPr indent="0" marL="0">
+              <a:buNone/>
+            </a:pPr>
+            <a:r>
+              <a:rPr lang="en-US" sz="1100" dirty="0">
+                <a:solidFill>
+                  <a:srgbClr val="92400E"/>
+                </a:solidFill>
+                <a:latin typeface="Calibri" pitchFamily="34" charset="0"/>
+                <a:ea typeface="Calibri" pitchFamily="34" charset="-122"/>
+                <a:cs typeface="Calibri" pitchFamily="34" charset="-120"/>
+              </a:rPr>
+              <a:t> · the PRG32 tools</a:t>
+            </a:r>
+            <a:endParaRPr lang="en-US" sz="1100" dirty="0"/>
+          </a:p>
+        </p:txBody>
+      </p:sp>
+      <p:sp>
+        <p:nvSpPr>
           <p:cNvPr id="25" name="Slide Number Placeholder 0"/>
           <p:cNvSpPr>
             <a:spLocks noGrp="1"/>
@@ -12768,6 +15299,158 @@
       </p:sp>
       <p:sp>
         <p:nvSpPr>
+          <p:cNvPr id="5" name="Shape 3"/>
+          <p:cNvSpPr/>
+          <p:nvPr/>
+        </p:nvSpPr>
+        <p:spPr>
+          <a:xfrm>
+            <a:off x="8959672" y="91440"/>
+            <a:ext cx="2683383" cy="274320"/>
+          </a:xfrm>
+          <a:prstGeom prst="rect">
+            <a:avLst/>
+          </a:prstGeom>
+          <a:solidFill>
+            <a:srgbClr val="FEF3C7"/>
+          </a:solidFill>
+          <a:ln w="12700">
+            <a:solidFill>
+              <a:srgbClr val="B45309"/>
+            </a:solidFill>
+            <a:prstDash val="solid"/>
+          </a:ln>
+        </p:spPr>
+      </p:sp>
+      <p:sp>
+        <p:nvSpPr>
+          <p:cNvPr id="6" name="Shape 4"/>
+          <p:cNvSpPr/>
+          <p:nvPr/>
+        </p:nvSpPr>
+        <p:spPr>
+          <a:xfrm>
+            <a:off x="8959672" y="91440"/>
+            <a:ext cx="27432" cy="274320"/>
+          </a:xfrm>
+          <a:prstGeom prst="rect">
+            <a:avLst/>
+          </a:prstGeom>
+          <a:solidFill>
+            <a:srgbClr val="B45309"/>
+          </a:solidFill>
+          <a:ln w="12700">
+            <a:solidFill>
+              <a:srgbClr val="B45309"/>
+            </a:solidFill>
+            <a:prstDash val="solid"/>
+          </a:ln>
+        </p:spPr>
+      </p:sp>
+      <p:sp>
+        <p:nvSpPr>
+          <p:cNvPr id="7" name="Shape 5"/>
+          <p:cNvSpPr/>
+          <p:nvPr/>
+        </p:nvSpPr>
+        <p:spPr>
+          <a:xfrm>
+            <a:off x="9014536" y="91440"/>
+            <a:ext cx="27432" cy="274320"/>
+          </a:xfrm>
+          <a:prstGeom prst="rect">
+            <a:avLst/>
+          </a:prstGeom>
+          <a:solidFill>
+            <a:srgbClr val="B45309"/>
+          </a:solidFill>
+          <a:ln w="12700">
+            <a:solidFill>
+              <a:srgbClr val="B45309"/>
+            </a:solidFill>
+            <a:prstDash val="solid"/>
+          </a:ln>
+        </p:spPr>
+      </p:sp>
+      <p:pic>
+        <p:nvPicPr>
+          <p:cNvPr id="8" name="Image 0" descr="preencoded.png">    </p:cNvPr>
+          <p:cNvPicPr>
+            <a:picLocks noChangeAspect="1"/>
+          </p:cNvPicPr>
+          <p:nvPr/>
+        </p:nvPicPr>
+        <p:blipFill>
+          <a:blip r:embed="rId1"/>
+          <a:stretch>
+            <a:fillRect/>
+          </a:stretch>
+        </p:blipFill>
+        <p:spPr>
+          <a:xfrm>
+            <a:off x="9087688" y="128016"/>
+            <a:ext cx="201168" cy="201168"/>
+          </a:xfrm>
+          <a:prstGeom prst="rect">
+            <a:avLst/>
+          </a:prstGeom>
+        </p:spPr>
+      </p:pic>
+      <p:sp>
+        <p:nvSpPr>
+          <p:cNvPr id="9" name="Text 6"/>
+          <p:cNvSpPr txBox="1"/>
+          <p:nvPr/>
+        </p:nvSpPr>
+        <p:spPr>
+          <a:xfrm>
+            <a:off x="9343720" y="91440"/>
+            <a:ext cx="2262759" cy="274320"/>
+          </a:xfrm>
+          <a:prstGeom prst="rect">
+            <a:avLst/>
+          </a:prstGeom>
+          <a:noFill/>
+          <a:ln/>
+        </p:spPr>
+        <p:txBody>
+          <a:bodyPr wrap="square" lIns="0" tIns="0" rIns="0" bIns="0" rtlCol="0" anchor="ctr"/>
+          <a:lstStyle/>
+          <a:p>
+            <a:pPr indent="0" marL="0">
+              <a:buNone/>
+            </a:pPr>
+            <a:r>
+              <a:rPr lang="en-US" sz="1100" b="1" dirty="0">
+                <a:solidFill>
+                  <a:srgbClr val="92400E"/>
+                </a:solidFill>
+                <a:latin typeface="Calibri" pitchFamily="34" charset="0"/>
+                <a:ea typeface="Calibri" pitchFamily="34" charset="-122"/>
+                <a:cs typeface="Calibri" pitchFamily="34" charset="-120"/>
+              </a:rPr>
+              <a:t>USE NOW</a:t>
+            </a:r>
+            <a:pPr indent="0" marL="0">
+              <a:buNone/>
+            </a:pPr>
+            <a:r>
+              <a:rPr lang="en-US" sz="1100" dirty="0">
+                <a:solidFill>
+                  <a:srgbClr val="92400E"/>
+                </a:solidFill>
+                <a:latin typeface="Calibri" pitchFamily="34" charset="0"/>
+                <a:ea typeface="Calibri" pitchFamily="34" charset="-122"/>
+                <a:cs typeface="Calibri" pitchFamily="34" charset="-120"/>
+              </a:rPr>
+              <a:t> · the complete program</a:t>
+            </a:r>
+            <a:endParaRPr lang="en-US" sz="1100" dirty="0"/>
+          </a:p>
+        </p:txBody>
+      </p:sp>
+      <p:sp>
+        <p:nvSpPr>
           <p:cNvPr id="25" name="Slide Number Placeholder 0"/>
           <p:cNvSpPr>
             <a:spLocks noGrp="1"/>
@@ -13465,6 +16148,158 @@
       </p:sp>
       <p:sp>
         <p:nvSpPr>
+          <p:cNvPr id="5" name="Shape 3"/>
+          <p:cNvSpPr/>
+          <p:nvPr/>
+        </p:nvSpPr>
+        <p:spPr>
+          <a:xfrm>
+            <a:off x="8959672" y="91440"/>
+            <a:ext cx="2683383" cy="274320"/>
+          </a:xfrm>
+          <a:prstGeom prst="rect">
+            <a:avLst/>
+          </a:prstGeom>
+          <a:solidFill>
+            <a:srgbClr val="FEF3C7"/>
+          </a:solidFill>
+          <a:ln w="12700">
+            <a:solidFill>
+              <a:srgbClr val="B45309"/>
+            </a:solidFill>
+            <a:prstDash val="solid"/>
+          </a:ln>
+        </p:spPr>
+      </p:sp>
+      <p:sp>
+        <p:nvSpPr>
+          <p:cNvPr id="6" name="Shape 4"/>
+          <p:cNvSpPr/>
+          <p:nvPr/>
+        </p:nvSpPr>
+        <p:spPr>
+          <a:xfrm>
+            <a:off x="8959672" y="91440"/>
+            <a:ext cx="27432" cy="274320"/>
+          </a:xfrm>
+          <a:prstGeom prst="rect">
+            <a:avLst/>
+          </a:prstGeom>
+          <a:solidFill>
+            <a:srgbClr val="B45309"/>
+          </a:solidFill>
+          <a:ln w="12700">
+            <a:solidFill>
+              <a:srgbClr val="B45309"/>
+            </a:solidFill>
+            <a:prstDash val="solid"/>
+          </a:ln>
+        </p:spPr>
+      </p:sp>
+      <p:sp>
+        <p:nvSpPr>
+          <p:cNvPr id="7" name="Shape 5"/>
+          <p:cNvSpPr/>
+          <p:nvPr/>
+        </p:nvSpPr>
+        <p:spPr>
+          <a:xfrm>
+            <a:off x="9014536" y="91440"/>
+            <a:ext cx="27432" cy="274320"/>
+          </a:xfrm>
+          <a:prstGeom prst="rect">
+            <a:avLst/>
+          </a:prstGeom>
+          <a:solidFill>
+            <a:srgbClr val="B45309"/>
+          </a:solidFill>
+          <a:ln w="12700">
+            <a:solidFill>
+              <a:srgbClr val="B45309"/>
+            </a:solidFill>
+            <a:prstDash val="solid"/>
+          </a:ln>
+        </p:spPr>
+      </p:sp>
+      <p:pic>
+        <p:nvPicPr>
+          <p:cNvPr id="8" name="Image 0" descr="preencoded.png">    </p:cNvPr>
+          <p:cNvPicPr>
+            <a:picLocks noChangeAspect="1"/>
+          </p:cNvPicPr>
+          <p:nvPr/>
+        </p:nvPicPr>
+        <p:blipFill>
+          <a:blip r:embed="rId1"/>
+          <a:stretch>
+            <a:fillRect/>
+          </a:stretch>
+        </p:blipFill>
+        <p:spPr>
+          <a:xfrm>
+            <a:off x="9087688" y="128016"/>
+            <a:ext cx="201168" cy="201168"/>
+          </a:xfrm>
+          <a:prstGeom prst="rect">
+            <a:avLst/>
+          </a:prstGeom>
+        </p:spPr>
+      </p:pic>
+      <p:sp>
+        <p:nvSpPr>
+          <p:cNvPr id="9" name="Text 6"/>
+          <p:cNvSpPr txBox="1"/>
+          <p:nvPr/>
+        </p:nvSpPr>
+        <p:spPr>
+          <a:xfrm>
+            <a:off x="9343720" y="91440"/>
+            <a:ext cx="2262759" cy="274320"/>
+          </a:xfrm>
+          <a:prstGeom prst="rect">
+            <a:avLst/>
+          </a:prstGeom>
+          <a:noFill/>
+          <a:ln/>
+        </p:spPr>
+        <p:txBody>
+          <a:bodyPr wrap="square" lIns="0" tIns="0" rIns="0" bIns="0" rtlCol="0" anchor="ctr"/>
+          <a:lstStyle/>
+          <a:p>
+            <a:pPr indent="0" marL="0">
+              <a:buNone/>
+            </a:pPr>
+            <a:r>
+              <a:rPr lang="en-US" sz="1100" b="1" dirty="0">
+                <a:solidFill>
+                  <a:srgbClr val="92400E"/>
+                </a:solidFill>
+                <a:latin typeface="Calibri" pitchFamily="34" charset="0"/>
+                <a:ea typeface="Calibri" pitchFamily="34" charset="-122"/>
+                <a:cs typeface="Calibri" pitchFamily="34" charset="-120"/>
+              </a:rPr>
+              <a:t>USE NOW</a:t>
+            </a:r>
+            <a:pPr indent="0" marL="0">
+              <a:buNone/>
+            </a:pPr>
+            <a:r>
+              <a:rPr lang="en-US" sz="1100" dirty="0">
+                <a:solidFill>
+                  <a:srgbClr val="92400E"/>
+                </a:solidFill>
+                <a:latin typeface="Calibri" pitchFamily="34" charset="0"/>
+                <a:ea typeface="Calibri" pitchFamily="34" charset="-122"/>
+                <a:cs typeface="Calibri" pitchFamily="34" charset="-120"/>
+              </a:rPr>
+              <a:t> · the complete program</a:t>
+            </a:r>
+            <a:endParaRPr lang="en-US" sz="1100" dirty="0"/>
+          </a:p>
+        </p:txBody>
+      </p:sp>
+      <p:sp>
+        <p:nvSpPr>
           <p:cNvPr id="25" name="Slide Number Placeholder 0"/>
           <p:cNvSpPr>
             <a:spLocks noGrp="1"/>
@@ -13812,6 +16647,158 @@
       </p:sp>
       <p:sp>
         <p:nvSpPr>
+          <p:cNvPr id="5" name="Shape 3"/>
+          <p:cNvSpPr/>
+          <p:nvPr/>
+        </p:nvSpPr>
+        <p:spPr>
+          <a:xfrm>
+            <a:off x="8959672" y="91440"/>
+            <a:ext cx="2683383" cy="274320"/>
+          </a:xfrm>
+          <a:prstGeom prst="rect">
+            <a:avLst/>
+          </a:prstGeom>
+          <a:solidFill>
+            <a:srgbClr val="FEF3C7"/>
+          </a:solidFill>
+          <a:ln w="12700">
+            <a:solidFill>
+              <a:srgbClr val="B45309"/>
+            </a:solidFill>
+            <a:prstDash val="solid"/>
+          </a:ln>
+        </p:spPr>
+      </p:sp>
+      <p:sp>
+        <p:nvSpPr>
+          <p:cNvPr id="6" name="Shape 4"/>
+          <p:cNvSpPr/>
+          <p:nvPr/>
+        </p:nvSpPr>
+        <p:spPr>
+          <a:xfrm>
+            <a:off x="8959672" y="91440"/>
+            <a:ext cx="27432" cy="274320"/>
+          </a:xfrm>
+          <a:prstGeom prst="rect">
+            <a:avLst/>
+          </a:prstGeom>
+          <a:solidFill>
+            <a:srgbClr val="B45309"/>
+          </a:solidFill>
+          <a:ln w="12700">
+            <a:solidFill>
+              <a:srgbClr val="B45309"/>
+            </a:solidFill>
+            <a:prstDash val="solid"/>
+          </a:ln>
+        </p:spPr>
+      </p:sp>
+      <p:sp>
+        <p:nvSpPr>
+          <p:cNvPr id="7" name="Shape 5"/>
+          <p:cNvSpPr/>
+          <p:nvPr/>
+        </p:nvSpPr>
+        <p:spPr>
+          <a:xfrm>
+            <a:off x="9014536" y="91440"/>
+            <a:ext cx="27432" cy="274320"/>
+          </a:xfrm>
+          <a:prstGeom prst="rect">
+            <a:avLst/>
+          </a:prstGeom>
+          <a:solidFill>
+            <a:srgbClr val="B45309"/>
+          </a:solidFill>
+          <a:ln w="12700">
+            <a:solidFill>
+              <a:srgbClr val="B45309"/>
+            </a:solidFill>
+            <a:prstDash val="solid"/>
+          </a:ln>
+        </p:spPr>
+      </p:sp>
+      <p:pic>
+        <p:nvPicPr>
+          <p:cNvPr id="8" name="Image 0" descr="preencoded.png">    </p:cNvPr>
+          <p:cNvPicPr>
+            <a:picLocks noChangeAspect="1"/>
+          </p:cNvPicPr>
+          <p:nvPr/>
+        </p:nvPicPr>
+        <p:blipFill>
+          <a:blip r:embed="rId1"/>
+          <a:stretch>
+            <a:fillRect/>
+          </a:stretch>
+        </p:blipFill>
+        <p:spPr>
+          <a:xfrm>
+            <a:off x="9087688" y="128016"/>
+            <a:ext cx="201168" cy="201168"/>
+          </a:xfrm>
+          <a:prstGeom prst="rect">
+            <a:avLst/>
+          </a:prstGeom>
+        </p:spPr>
+      </p:pic>
+      <p:sp>
+        <p:nvSpPr>
+          <p:cNvPr id="9" name="Text 6"/>
+          <p:cNvSpPr txBox="1"/>
+          <p:nvPr/>
+        </p:nvSpPr>
+        <p:spPr>
+          <a:xfrm>
+            <a:off x="9343720" y="91440"/>
+            <a:ext cx="2262759" cy="274320"/>
+          </a:xfrm>
+          <a:prstGeom prst="rect">
+            <a:avLst/>
+          </a:prstGeom>
+          <a:noFill/>
+          <a:ln/>
+        </p:spPr>
+        <p:txBody>
+          <a:bodyPr wrap="square" lIns="0" tIns="0" rIns="0" bIns="0" rtlCol="0" anchor="ctr"/>
+          <a:lstStyle/>
+          <a:p>
+            <a:pPr indent="0" marL="0">
+              <a:buNone/>
+            </a:pPr>
+            <a:r>
+              <a:rPr lang="en-US" sz="1100" b="1" dirty="0">
+                <a:solidFill>
+                  <a:srgbClr val="92400E"/>
+                </a:solidFill>
+                <a:latin typeface="Calibri" pitchFamily="34" charset="0"/>
+                <a:ea typeface="Calibri" pitchFamily="34" charset="-122"/>
+                <a:cs typeface="Calibri" pitchFamily="34" charset="-120"/>
+              </a:rPr>
+              <a:t>USE NOW</a:t>
+            </a:r>
+            <a:pPr indent="0" marL="0">
+              <a:buNone/>
+            </a:pPr>
+            <a:r>
+              <a:rPr lang="en-US" sz="1100" dirty="0">
+                <a:solidFill>
+                  <a:srgbClr val="92400E"/>
+                </a:solidFill>
+                <a:latin typeface="Calibri" pitchFamily="34" charset="0"/>
+                <a:ea typeface="Calibri" pitchFamily="34" charset="-122"/>
+                <a:cs typeface="Calibri" pitchFamily="34" charset="-120"/>
+              </a:rPr>
+              <a:t> · the complete program</a:t>
+            </a:r>
+            <a:endParaRPr lang="en-US" sz="1100" dirty="0"/>
+          </a:p>
+        </p:txBody>
+      </p:sp>
+      <p:sp>
+        <p:nvSpPr>
           <p:cNvPr id="25" name="Slide Number Placeholder 0"/>
           <p:cNvSpPr>
             <a:spLocks noGrp="1"/>
@@ -14965,6 +17952,158 @@
       </p:sp>
       <p:sp>
         <p:nvSpPr>
+          <p:cNvPr id="17" name="Shape 15"/>
+          <p:cNvSpPr/>
+          <p:nvPr/>
+        </p:nvSpPr>
+        <p:spPr>
+          <a:xfrm>
+            <a:off x="9287967" y="91440"/>
+            <a:ext cx="2355088" cy="274320"/>
+          </a:xfrm>
+          <a:prstGeom prst="rect">
+            <a:avLst/>
+          </a:prstGeom>
+          <a:solidFill>
+            <a:srgbClr val="FEF3C7"/>
+          </a:solidFill>
+          <a:ln w="12700">
+            <a:solidFill>
+              <a:srgbClr val="B45309"/>
+            </a:solidFill>
+            <a:prstDash val="solid"/>
+          </a:ln>
+        </p:spPr>
+      </p:sp>
+      <p:sp>
+        <p:nvSpPr>
+          <p:cNvPr id="18" name="Shape 16"/>
+          <p:cNvSpPr/>
+          <p:nvPr/>
+        </p:nvSpPr>
+        <p:spPr>
+          <a:xfrm>
+            <a:off x="9287967" y="91440"/>
+            <a:ext cx="27432" cy="274320"/>
+          </a:xfrm>
+          <a:prstGeom prst="rect">
+            <a:avLst/>
+          </a:prstGeom>
+          <a:solidFill>
+            <a:srgbClr val="B45309"/>
+          </a:solidFill>
+          <a:ln w="12700">
+            <a:solidFill>
+              <a:srgbClr val="B45309"/>
+            </a:solidFill>
+            <a:prstDash val="solid"/>
+          </a:ln>
+        </p:spPr>
+      </p:sp>
+      <p:sp>
+        <p:nvSpPr>
+          <p:cNvPr id="19" name="Shape 17"/>
+          <p:cNvSpPr/>
+          <p:nvPr/>
+        </p:nvSpPr>
+        <p:spPr>
+          <a:xfrm>
+            <a:off x="9342831" y="91440"/>
+            <a:ext cx="27432" cy="274320"/>
+          </a:xfrm>
+          <a:prstGeom prst="rect">
+            <a:avLst/>
+          </a:prstGeom>
+          <a:solidFill>
+            <a:srgbClr val="B45309"/>
+          </a:solidFill>
+          <a:ln w="12700">
+            <a:solidFill>
+              <a:srgbClr val="B45309"/>
+            </a:solidFill>
+            <a:prstDash val="solid"/>
+          </a:ln>
+        </p:spPr>
+      </p:sp>
+      <p:pic>
+        <p:nvPicPr>
+          <p:cNvPr id="20" name="Image 0" descr="preencoded.png">    </p:cNvPr>
+          <p:cNvPicPr>
+            <a:picLocks noChangeAspect="1"/>
+          </p:cNvPicPr>
+          <p:nvPr/>
+        </p:nvPicPr>
+        <p:blipFill>
+          <a:blip r:embed="rId1"/>
+          <a:stretch>
+            <a:fillRect/>
+          </a:stretch>
+        </p:blipFill>
+        <p:spPr>
+          <a:xfrm>
+            <a:off x="9415983" y="128016"/>
+            <a:ext cx="201168" cy="201168"/>
+          </a:xfrm>
+          <a:prstGeom prst="rect">
+            <a:avLst/>
+          </a:prstGeom>
+        </p:spPr>
+      </p:pic>
+      <p:sp>
+        <p:nvSpPr>
+          <p:cNvPr id="21" name="Text 18"/>
+          <p:cNvSpPr txBox="1"/>
+          <p:nvPr/>
+        </p:nvSpPr>
+        <p:spPr>
+          <a:xfrm>
+            <a:off x="9672015" y="91440"/>
+            <a:ext cx="1934464" cy="274320"/>
+          </a:xfrm>
+          <a:prstGeom prst="rect">
+            <a:avLst/>
+          </a:prstGeom>
+          <a:noFill/>
+          <a:ln/>
+        </p:spPr>
+        <p:txBody>
+          <a:bodyPr wrap="square" lIns="0" tIns="0" rIns="0" bIns="0" rtlCol="0" anchor="ctr"/>
+          <a:lstStyle/>
+          <a:p>
+            <a:pPr indent="0" marL="0">
+              <a:buNone/>
+            </a:pPr>
+            <a:r>
+              <a:rPr lang="en-US" sz="1100" b="1" dirty="0">
+                <a:solidFill>
+                  <a:srgbClr val="92400E"/>
+                </a:solidFill>
+                <a:latin typeface="Calibri" pitchFamily="34" charset="0"/>
+                <a:ea typeface="Calibri" pitchFamily="34" charset="-122"/>
+                <a:cs typeface="Calibri" pitchFamily="34" charset="-120"/>
+              </a:rPr>
+              <a:t>USE NOW</a:t>
+            </a:r>
+            <a:pPr indent="0" marL="0">
+              <a:buNone/>
+            </a:pPr>
+            <a:r>
+              <a:rPr lang="en-US" sz="1100" dirty="0">
+                <a:solidFill>
+                  <a:srgbClr val="92400E"/>
+                </a:solidFill>
+                <a:latin typeface="Calibri" pitchFamily="34" charset="0"/>
+                <a:ea typeface="Calibri" pitchFamily="34" charset="-122"/>
+                <a:cs typeface="Calibri" pitchFamily="34" charset="-120"/>
+              </a:rPr>
+              <a:t> · the PRG32 tools</a:t>
+            </a:r>
+            <a:endParaRPr lang="en-US" sz="1100" dirty="0"/>
+          </a:p>
+        </p:txBody>
+      </p:sp>
+      <p:sp>
+        <p:nvSpPr>
           <p:cNvPr id="25" name="Slide Number Placeholder 0"/>
           <p:cNvSpPr>
             <a:spLocks noGrp="1"/>
@@ -15801,6 +18940,158 @@
       </p:sp>
       <p:sp>
         <p:nvSpPr>
+          <p:cNvPr id="17" name="Shape 15"/>
+          <p:cNvSpPr/>
+          <p:nvPr/>
+        </p:nvSpPr>
+        <p:spPr>
+          <a:xfrm>
+            <a:off x="9287967" y="91440"/>
+            <a:ext cx="2355088" cy="274320"/>
+          </a:xfrm>
+          <a:prstGeom prst="rect">
+            <a:avLst/>
+          </a:prstGeom>
+          <a:solidFill>
+            <a:srgbClr val="FEF3C7"/>
+          </a:solidFill>
+          <a:ln w="12700">
+            <a:solidFill>
+              <a:srgbClr val="B45309"/>
+            </a:solidFill>
+            <a:prstDash val="solid"/>
+          </a:ln>
+        </p:spPr>
+      </p:sp>
+      <p:sp>
+        <p:nvSpPr>
+          <p:cNvPr id="18" name="Shape 16"/>
+          <p:cNvSpPr/>
+          <p:nvPr/>
+        </p:nvSpPr>
+        <p:spPr>
+          <a:xfrm>
+            <a:off x="9287967" y="91440"/>
+            <a:ext cx="27432" cy="274320"/>
+          </a:xfrm>
+          <a:prstGeom prst="rect">
+            <a:avLst/>
+          </a:prstGeom>
+          <a:solidFill>
+            <a:srgbClr val="B45309"/>
+          </a:solidFill>
+          <a:ln w="12700">
+            <a:solidFill>
+              <a:srgbClr val="B45309"/>
+            </a:solidFill>
+            <a:prstDash val="solid"/>
+          </a:ln>
+        </p:spPr>
+      </p:sp>
+      <p:sp>
+        <p:nvSpPr>
+          <p:cNvPr id="19" name="Shape 17"/>
+          <p:cNvSpPr/>
+          <p:nvPr/>
+        </p:nvSpPr>
+        <p:spPr>
+          <a:xfrm>
+            <a:off x="9342831" y="91440"/>
+            <a:ext cx="27432" cy="274320"/>
+          </a:xfrm>
+          <a:prstGeom prst="rect">
+            <a:avLst/>
+          </a:prstGeom>
+          <a:solidFill>
+            <a:srgbClr val="B45309"/>
+          </a:solidFill>
+          <a:ln w="12700">
+            <a:solidFill>
+              <a:srgbClr val="B45309"/>
+            </a:solidFill>
+            <a:prstDash val="solid"/>
+          </a:ln>
+        </p:spPr>
+      </p:sp>
+      <p:pic>
+        <p:nvPicPr>
+          <p:cNvPr id="20" name="Image 0" descr="preencoded.png">    </p:cNvPr>
+          <p:cNvPicPr>
+            <a:picLocks noChangeAspect="1"/>
+          </p:cNvPicPr>
+          <p:nvPr/>
+        </p:nvPicPr>
+        <p:blipFill>
+          <a:blip r:embed="rId1"/>
+          <a:stretch>
+            <a:fillRect/>
+          </a:stretch>
+        </p:blipFill>
+        <p:spPr>
+          <a:xfrm>
+            <a:off x="9415983" y="128016"/>
+            <a:ext cx="201168" cy="201168"/>
+          </a:xfrm>
+          <a:prstGeom prst="rect">
+            <a:avLst/>
+          </a:prstGeom>
+        </p:spPr>
+      </p:pic>
+      <p:sp>
+        <p:nvSpPr>
+          <p:cNvPr id="21" name="Text 18"/>
+          <p:cNvSpPr txBox="1"/>
+          <p:nvPr/>
+        </p:nvSpPr>
+        <p:spPr>
+          <a:xfrm>
+            <a:off x="9672015" y="91440"/>
+            <a:ext cx="1934464" cy="274320"/>
+          </a:xfrm>
+          <a:prstGeom prst="rect">
+            <a:avLst/>
+          </a:prstGeom>
+          <a:noFill/>
+          <a:ln/>
+        </p:spPr>
+        <p:txBody>
+          <a:bodyPr wrap="square" lIns="0" tIns="0" rIns="0" bIns="0" rtlCol="0" anchor="ctr"/>
+          <a:lstStyle/>
+          <a:p>
+            <a:pPr indent="0" marL="0">
+              <a:buNone/>
+            </a:pPr>
+            <a:r>
+              <a:rPr lang="en-US" sz="1100" b="1" dirty="0">
+                <a:solidFill>
+                  <a:srgbClr val="92400E"/>
+                </a:solidFill>
+                <a:latin typeface="Calibri" pitchFamily="34" charset="0"/>
+                <a:ea typeface="Calibri" pitchFamily="34" charset="-122"/>
+                <a:cs typeface="Calibri" pitchFamily="34" charset="-120"/>
+              </a:rPr>
+              <a:t>USE NOW</a:t>
+            </a:r>
+            <a:pPr indent="0" marL="0">
+              <a:buNone/>
+            </a:pPr>
+            <a:r>
+              <a:rPr lang="en-US" sz="1100" dirty="0">
+                <a:solidFill>
+                  <a:srgbClr val="92400E"/>
+                </a:solidFill>
+                <a:latin typeface="Calibri" pitchFamily="34" charset="0"/>
+                <a:ea typeface="Calibri" pitchFamily="34" charset="-122"/>
+                <a:cs typeface="Calibri" pitchFamily="34" charset="-120"/>
+              </a:rPr>
+              <a:t> · the PRG32 tools</a:t>
+            </a:r>
+            <a:endParaRPr lang="en-US" sz="1100" dirty="0"/>
+          </a:p>
+        </p:txBody>
+      </p:sp>
+      <p:sp>
+        <p:nvSpPr>
           <p:cNvPr id="25" name="Slide Number Placeholder 0"/>
           <p:cNvSpPr>
             <a:spLocks noGrp="1"/>
@@ -16632,6 +19923,158 @@
               <a:t>A black screen: check the wiring of the display against the firmware</a:t>
             </a:r>
             <a:endParaRPr lang="en-US" sz="1200" dirty="0"/>
+          </a:p>
+        </p:txBody>
+      </p:sp>
+      <p:sp>
+        <p:nvSpPr>
+          <p:cNvPr id="17" name="Shape 15"/>
+          <p:cNvSpPr/>
+          <p:nvPr/>
+        </p:nvSpPr>
+        <p:spPr>
+          <a:xfrm>
+            <a:off x="9287967" y="91440"/>
+            <a:ext cx="2355088" cy="274320"/>
+          </a:xfrm>
+          <a:prstGeom prst="rect">
+            <a:avLst/>
+          </a:prstGeom>
+          <a:solidFill>
+            <a:srgbClr val="FEF3C7"/>
+          </a:solidFill>
+          <a:ln w="12700">
+            <a:solidFill>
+              <a:srgbClr val="B45309"/>
+            </a:solidFill>
+            <a:prstDash val="solid"/>
+          </a:ln>
+        </p:spPr>
+      </p:sp>
+      <p:sp>
+        <p:nvSpPr>
+          <p:cNvPr id="18" name="Shape 16"/>
+          <p:cNvSpPr/>
+          <p:nvPr/>
+        </p:nvSpPr>
+        <p:spPr>
+          <a:xfrm>
+            <a:off x="9287967" y="91440"/>
+            <a:ext cx="27432" cy="274320"/>
+          </a:xfrm>
+          <a:prstGeom prst="rect">
+            <a:avLst/>
+          </a:prstGeom>
+          <a:solidFill>
+            <a:srgbClr val="B45309"/>
+          </a:solidFill>
+          <a:ln w="12700">
+            <a:solidFill>
+              <a:srgbClr val="B45309"/>
+            </a:solidFill>
+            <a:prstDash val="solid"/>
+          </a:ln>
+        </p:spPr>
+      </p:sp>
+      <p:sp>
+        <p:nvSpPr>
+          <p:cNvPr id="19" name="Shape 17"/>
+          <p:cNvSpPr/>
+          <p:nvPr/>
+        </p:nvSpPr>
+        <p:spPr>
+          <a:xfrm>
+            <a:off x="9342831" y="91440"/>
+            <a:ext cx="27432" cy="274320"/>
+          </a:xfrm>
+          <a:prstGeom prst="rect">
+            <a:avLst/>
+          </a:prstGeom>
+          <a:solidFill>
+            <a:srgbClr val="B45309"/>
+          </a:solidFill>
+          <a:ln w="12700">
+            <a:solidFill>
+              <a:srgbClr val="B45309"/>
+            </a:solidFill>
+            <a:prstDash val="solid"/>
+          </a:ln>
+        </p:spPr>
+      </p:sp>
+      <p:pic>
+        <p:nvPicPr>
+          <p:cNvPr id="20" name="Image 0" descr="preencoded.png">    </p:cNvPr>
+          <p:cNvPicPr>
+            <a:picLocks noChangeAspect="1"/>
+          </p:cNvPicPr>
+          <p:nvPr/>
+        </p:nvPicPr>
+        <p:blipFill>
+          <a:blip r:embed="rId1"/>
+          <a:stretch>
+            <a:fillRect/>
+          </a:stretch>
+        </p:blipFill>
+        <p:spPr>
+          <a:xfrm>
+            <a:off x="9415983" y="128016"/>
+            <a:ext cx="201168" cy="201168"/>
+          </a:xfrm>
+          <a:prstGeom prst="rect">
+            <a:avLst/>
+          </a:prstGeom>
+        </p:spPr>
+      </p:pic>
+      <p:sp>
+        <p:nvSpPr>
+          <p:cNvPr id="21" name="Text 18"/>
+          <p:cNvSpPr txBox="1"/>
+          <p:nvPr/>
+        </p:nvSpPr>
+        <p:spPr>
+          <a:xfrm>
+            <a:off x="9672015" y="91440"/>
+            <a:ext cx="1934464" cy="274320"/>
+          </a:xfrm>
+          <a:prstGeom prst="rect">
+            <a:avLst/>
+          </a:prstGeom>
+          <a:noFill/>
+          <a:ln/>
+        </p:spPr>
+        <p:txBody>
+          <a:bodyPr wrap="square" lIns="0" tIns="0" rIns="0" bIns="0" rtlCol="0" anchor="ctr"/>
+          <a:lstStyle/>
+          <a:p>
+            <a:pPr indent="0" marL="0">
+              <a:buNone/>
+            </a:pPr>
+            <a:r>
+              <a:rPr lang="en-US" sz="1100" b="1" dirty="0">
+                <a:solidFill>
+                  <a:srgbClr val="92400E"/>
+                </a:solidFill>
+                <a:latin typeface="Calibri" pitchFamily="34" charset="0"/>
+                <a:ea typeface="Calibri" pitchFamily="34" charset="-122"/>
+                <a:cs typeface="Calibri" pitchFamily="34" charset="-120"/>
+              </a:rPr>
+              <a:t>USE NOW</a:t>
+            </a:r>
+            <a:pPr indent="0" marL="0">
+              <a:buNone/>
+            </a:pPr>
+            <a:r>
+              <a:rPr lang="en-US" sz="1100" dirty="0">
+                <a:solidFill>
+                  <a:srgbClr val="92400E"/>
+                </a:solidFill>
+                <a:latin typeface="Calibri" pitchFamily="34" charset="0"/>
+                <a:ea typeface="Calibri" pitchFamily="34" charset="-122"/>
+                <a:cs typeface="Calibri" pitchFamily="34" charset="-120"/>
+              </a:rPr>
+              <a:t> · the PRG32 tools</a:t>
+            </a:r>
+            <a:endParaRPr lang="en-US" sz="1100" dirty="0"/>
           </a:p>
         </p:txBody>
       </p:sp>
@@ -18018,6 +21461,158 @@
       </p:graphicFrame>
       <p:sp>
         <p:nvSpPr>
+          <p:cNvPr id="4" name="Shape 1"/>
+          <p:cNvSpPr/>
+          <p:nvPr/>
+        </p:nvSpPr>
+        <p:spPr>
+          <a:xfrm>
+            <a:off x="9287967" y="91440"/>
+            <a:ext cx="2355088" cy="274320"/>
+          </a:xfrm>
+          <a:prstGeom prst="rect">
+            <a:avLst/>
+          </a:prstGeom>
+          <a:solidFill>
+            <a:srgbClr val="FEF3C7"/>
+          </a:solidFill>
+          <a:ln w="12700">
+            <a:solidFill>
+              <a:srgbClr val="B45309"/>
+            </a:solidFill>
+            <a:prstDash val="solid"/>
+          </a:ln>
+        </p:spPr>
+      </p:sp>
+      <p:sp>
+        <p:nvSpPr>
+          <p:cNvPr id="5" name="Shape 2"/>
+          <p:cNvSpPr/>
+          <p:nvPr/>
+        </p:nvSpPr>
+        <p:spPr>
+          <a:xfrm>
+            <a:off x="9287967" y="91440"/>
+            <a:ext cx="27432" cy="274320"/>
+          </a:xfrm>
+          <a:prstGeom prst="rect">
+            <a:avLst/>
+          </a:prstGeom>
+          <a:solidFill>
+            <a:srgbClr val="B45309"/>
+          </a:solidFill>
+          <a:ln w="12700">
+            <a:solidFill>
+              <a:srgbClr val="B45309"/>
+            </a:solidFill>
+            <a:prstDash val="solid"/>
+          </a:ln>
+        </p:spPr>
+      </p:sp>
+      <p:sp>
+        <p:nvSpPr>
+          <p:cNvPr id="6" name="Shape 3"/>
+          <p:cNvSpPr/>
+          <p:nvPr/>
+        </p:nvSpPr>
+        <p:spPr>
+          <a:xfrm>
+            <a:off x="9342831" y="91440"/>
+            <a:ext cx="27432" cy="274320"/>
+          </a:xfrm>
+          <a:prstGeom prst="rect">
+            <a:avLst/>
+          </a:prstGeom>
+          <a:solidFill>
+            <a:srgbClr val="B45309"/>
+          </a:solidFill>
+          <a:ln w="12700">
+            <a:solidFill>
+              <a:srgbClr val="B45309"/>
+            </a:solidFill>
+            <a:prstDash val="solid"/>
+          </a:ln>
+        </p:spPr>
+      </p:sp>
+      <p:pic>
+        <p:nvPicPr>
+          <p:cNvPr id="7" name="Image 0" descr="preencoded.png">    </p:cNvPr>
+          <p:cNvPicPr>
+            <a:picLocks noChangeAspect="1"/>
+          </p:cNvPicPr>
+          <p:nvPr/>
+        </p:nvPicPr>
+        <p:blipFill>
+          <a:blip r:embed="rId1"/>
+          <a:stretch>
+            <a:fillRect/>
+          </a:stretch>
+        </p:blipFill>
+        <p:spPr>
+          <a:xfrm>
+            <a:off x="9415983" y="128016"/>
+            <a:ext cx="201168" cy="201168"/>
+          </a:xfrm>
+          <a:prstGeom prst="rect">
+            <a:avLst/>
+          </a:prstGeom>
+        </p:spPr>
+      </p:pic>
+      <p:sp>
+        <p:nvSpPr>
+          <p:cNvPr id="8" name="Text 4"/>
+          <p:cNvSpPr txBox="1"/>
+          <p:nvPr/>
+        </p:nvSpPr>
+        <p:spPr>
+          <a:xfrm>
+            <a:off x="9672015" y="91440"/>
+            <a:ext cx="1934464" cy="274320"/>
+          </a:xfrm>
+          <a:prstGeom prst="rect">
+            <a:avLst/>
+          </a:prstGeom>
+          <a:noFill/>
+          <a:ln/>
+        </p:spPr>
+        <p:txBody>
+          <a:bodyPr wrap="square" lIns="0" tIns="0" rIns="0" bIns="0" rtlCol="0" anchor="ctr"/>
+          <a:lstStyle/>
+          <a:p>
+            <a:pPr indent="0" marL="0">
+              <a:buNone/>
+            </a:pPr>
+            <a:r>
+              <a:rPr lang="en-US" sz="1100" b="1" dirty="0">
+                <a:solidFill>
+                  <a:srgbClr val="92400E"/>
+                </a:solidFill>
+                <a:latin typeface="Calibri" pitchFamily="34" charset="0"/>
+                <a:ea typeface="Calibri" pitchFamily="34" charset="-122"/>
+                <a:cs typeface="Calibri" pitchFamily="34" charset="-120"/>
+              </a:rPr>
+              <a:t>USE NOW</a:t>
+            </a:r>
+            <a:pPr indent="0" marL="0">
+              <a:buNone/>
+            </a:pPr>
+            <a:r>
+              <a:rPr lang="en-US" sz="1100" dirty="0">
+                <a:solidFill>
+                  <a:srgbClr val="92400E"/>
+                </a:solidFill>
+                <a:latin typeface="Calibri" pitchFamily="34" charset="0"/>
+                <a:ea typeface="Calibri" pitchFamily="34" charset="-122"/>
+                <a:cs typeface="Calibri" pitchFamily="34" charset="-120"/>
+              </a:rPr>
+              <a:t> · the PRG32 tools</a:t>
+            </a:r>
+            <a:endParaRPr lang="en-US" sz="1100" dirty="0"/>
+          </a:p>
+        </p:txBody>
+      </p:sp>
+      <p:sp>
+        <p:nvSpPr>
           <p:cNvPr id="25" name="Slide Number Placeholder 0"/>
           <p:cNvSpPr>
             <a:spLocks noGrp="1"/>
@@ -20149,6 +23744,158 @@
       </p:sp>
       <p:sp>
         <p:nvSpPr>
+          <p:cNvPr id="5" name="Shape 2"/>
+          <p:cNvSpPr/>
+          <p:nvPr/>
+        </p:nvSpPr>
+        <p:spPr>
+          <a:xfrm>
+            <a:off x="9287967" y="91440"/>
+            <a:ext cx="2355088" cy="274320"/>
+          </a:xfrm>
+          <a:prstGeom prst="rect">
+            <a:avLst/>
+          </a:prstGeom>
+          <a:solidFill>
+            <a:srgbClr val="FEF3C7"/>
+          </a:solidFill>
+          <a:ln w="12700">
+            <a:solidFill>
+              <a:srgbClr val="B45309"/>
+            </a:solidFill>
+            <a:prstDash val="solid"/>
+          </a:ln>
+        </p:spPr>
+      </p:sp>
+      <p:sp>
+        <p:nvSpPr>
+          <p:cNvPr id="6" name="Shape 3"/>
+          <p:cNvSpPr/>
+          <p:nvPr/>
+        </p:nvSpPr>
+        <p:spPr>
+          <a:xfrm>
+            <a:off x="9287967" y="91440"/>
+            <a:ext cx="27432" cy="274320"/>
+          </a:xfrm>
+          <a:prstGeom prst="rect">
+            <a:avLst/>
+          </a:prstGeom>
+          <a:solidFill>
+            <a:srgbClr val="B45309"/>
+          </a:solidFill>
+          <a:ln w="12700">
+            <a:solidFill>
+              <a:srgbClr val="B45309"/>
+            </a:solidFill>
+            <a:prstDash val="solid"/>
+          </a:ln>
+        </p:spPr>
+      </p:sp>
+      <p:sp>
+        <p:nvSpPr>
+          <p:cNvPr id="7" name="Shape 4"/>
+          <p:cNvSpPr/>
+          <p:nvPr/>
+        </p:nvSpPr>
+        <p:spPr>
+          <a:xfrm>
+            <a:off x="9342831" y="91440"/>
+            <a:ext cx="27432" cy="274320"/>
+          </a:xfrm>
+          <a:prstGeom prst="rect">
+            <a:avLst/>
+          </a:prstGeom>
+          <a:solidFill>
+            <a:srgbClr val="B45309"/>
+          </a:solidFill>
+          <a:ln w="12700">
+            <a:solidFill>
+              <a:srgbClr val="B45309"/>
+            </a:solidFill>
+            <a:prstDash val="solid"/>
+          </a:ln>
+        </p:spPr>
+      </p:sp>
+      <p:pic>
+        <p:nvPicPr>
+          <p:cNvPr id="8" name="Image 0" descr="preencoded.png">    </p:cNvPr>
+          <p:cNvPicPr>
+            <a:picLocks noChangeAspect="1"/>
+          </p:cNvPicPr>
+          <p:nvPr/>
+        </p:nvPicPr>
+        <p:blipFill>
+          <a:blip r:embed="rId1"/>
+          <a:stretch>
+            <a:fillRect/>
+          </a:stretch>
+        </p:blipFill>
+        <p:spPr>
+          <a:xfrm>
+            <a:off x="9415983" y="128016"/>
+            <a:ext cx="201168" cy="201168"/>
+          </a:xfrm>
+          <a:prstGeom prst="rect">
+            <a:avLst/>
+          </a:prstGeom>
+        </p:spPr>
+      </p:pic>
+      <p:sp>
+        <p:nvSpPr>
+          <p:cNvPr id="9" name="Text 5"/>
+          <p:cNvSpPr txBox="1"/>
+          <p:nvPr/>
+        </p:nvSpPr>
+        <p:spPr>
+          <a:xfrm>
+            <a:off x="9672015" y="91440"/>
+            <a:ext cx="1934464" cy="274320"/>
+          </a:xfrm>
+          <a:prstGeom prst="rect">
+            <a:avLst/>
+          </a:prstGeom>
+          <a:noFill/>
+          <a:ln/>
+        </p:spPr>
+        <p:txBody>
+          <a:bodyPr wrap="square" lIns="0" tIns="0" rIns="0" bIns="0" rtlCol="0" anchor="ctr"/>
+          <a:lstStyle/>
+          <a:p>
+            <a:pPr indent="0" marL="0">
+              <a:buNone/>
+            </a:pPr>
+            <a:r>
+              <a:rPr lang="en-US" sz="1100" b="1" dirty="0">
+                <a:solidFill>
+                  <a:srgbClr val="92400E"/>
+                </a:solidFill>
+                <a:latin typeface="Calibri" pitchFamily="34" charset="0"/>
+                <a:ea typeface="Calibri" pitchFamily="34" charset="-122"/>
+                <a:cs typeface="Calibri" pitchFamily="34" charset="-120"/>
+              </a:rPr>
+              <a:t>USE NOW</a:t>
+            </a:r>
+            <a:pPr indent="0" marL="0">
+              <a:buNone/>
+            </a:pPr>
+            <a:r>
+              <a:rPr lang="en-US" sz="1100" dirty="0">
+                <a:solidFill>
+                  <a:srgbClr val="92400E"/>
+                </a:solidFill>
+                <a:latin typeface="Calibri" pitchFamily="34" charset="0"/>
+                <a:ea typeface="Calibri" pitchFamily="34" charset="-122"/>
+                <a:cs typeface="Calibri" pitchFamily="34" charset="-120"/>
+              </a:rPr>
+              <a:t> · the PRG32 tools</a:t>
+            </a:r>
+            <a:endParaRPr lang="en-US" sz="1100" dirty="0"/>
+          </a:p>
+        </p:txBody>
+      </p:sp>
+      <p:sp>
+        <p:nvSpPr>
           <p:cNvPr id="25" name="Slide Number Placeholder 0"/>
           <p:cNvSpPr>
             <a:spLocks noGrp="1"/>
@@ -20946,6 +24693,158 @@
       </p:sp>
       <p:sp>
         <p:nvSpPr>
+          <p:cNvPr id="22" name="Shape 20"/>
+          <p:cNvSpPr/>
+          <p:nvPr/>
+        </p:nvSpPr>
+        <p:spPr>
+          <a:xfrm>
+            <a:off x="9287967" y="91440"/>
+            <a:ext cx="2355088" cy="274320"/>
+          </a:xfrm>
+          <a:prstGeom prst="rect">
+            <a:avLst/>
+          </a:prstGeom>
+          <a:solidFill>
+            <a:srgbClr val="FEF3C7"/>
+          </a:solidFill>
+          <a:ln w="12700">
+            <a:solidFill>
+              <a:srgbClr val="B45309"/>
+            </a:solidFill>
+            <a:prstDash val="solid"/>
+          </a:ln>
+        </p:spPr>
+      </p:sp>
+      <p:sp>
+        <p:nvSpPr>
+          <p:cNvPr id="23" name="Shape 21"/>
+          <p:cNvSpPr/>
+          <p:nvPr/>
+        </p:nvSpPr>
+        <p:spPr>
+          <a:xfrm>
+            <a:off x="9287967" y="91440"/>
+            <a:ext cx="27432" cy="274320"/>
+          </a:xfrm>
+          <a:prstGeom prst="rect">
+            <a:avLst/>
+          </a:prstGeom>
+          <a:solidFill>
+            <a:srgbClr val="B45309"/>
+          </a:solidFill>
+          <a:ln w="12700">
+            <a:solidFill>
+              <a:srgbClr val="B45309"/>
+            </a:solidFill>
+            <a:prstDash val="solid"/>
+          </a:ln>
+        </p:spPr>
+      </p:sp>
+      <p:sp>
+        <p:nvSpPr>
+          <p:cNvPr id="24" name="Shape 22"/>
+          <p:cNvSpPr/>
+          <p:nvPr/>
+        </p:nvSpPr>
+        <p:spPr>
+          <a:xfrm>
+            <a:off x="9342831" y="91440"/>
+            <a:ext cx="27432" cy="274320"/>
+          </a:xfrm>
+          <a:prstGeom prst="rect">
+            <a:avLst/>
+          </a:prstGeom>
+          <a:solidFill>
+            <a:srgbClr val="B45309"/>
+          </a:solidFill>
+          <a:ln w="12700">
+            <a:solidFill>
+              <a:srgbClr val="B45309"/>
+            </a:solidFill>
+            <a:prstDash val="solid"/>
+          </a:ln>
+        </p:spPr>
+      </p:sp>
+      <p:pic>
+        <p:nvPicPr>
+          <p:cNvPr id="25" name="Image 0" descr="preencoded.png">    </p:cNvPr>
+          <p:cNvPicPr>
+            <a:picLocks noChangeAspect="1"/>
+          </p:cNvPicPr>
+          <p:nvPr/>
+        </p:nvPicPr>
+        <p:blipFill>
+          <a:blip r:embed="rId1"/>
+          <a:stretch>
+            <a:fillRect/>
+          </a:stretch>
+        </p:blipFill>
+        <p:spPr>
+          <a:xfrm>
+            <a:off x="9415983" y="128016"/>
+            <a:ext cx="201168" cy="201168"/>
+          </a:xfrm>
+          <a:prstGeom prst="rect">
+            <a:avLst/>
+          </a:prstGeom>
+        </p:spPr>
+      </p:pic>
+      <p:sp>
+        <p:nvSpPr>
+          <p:cNvPr id="26" name="Text 23"/>
+          <p:cNvSpPr txBox="1"/>
+          <p:nvPr/>
+        </p:nvSpPr>
+        <p:spPr>
+          <a:xfrm>
+            <a:off x="9672015" y="91440"/>
+            <a:ext cx="1934464" cy="274320"/>
+          </a:xfrm>
+          <a:prstGeom prst="rect">
+            <a:avLst/>
+          </a:prstGeom>
+          <a:noFill/>
+          <a:ln/>
+        </p:spPr>
+        <p:txBody>
+          <a:bodyPr wrap="square" lIns="0" tIns="0" rIns="0" bIns="0" rtlCol="0" anchor="ctr"/>
+          <a:lstStyle/>
+          <a:p>
+            <a:pPr indent="0" marL="0">
+              <a:buNone/>
+            </a:pPr>
+            <a:r>
+              <a:rPr lang="en-US" sz="1100" b="1" dirty="0">
+                <a:solidFill>
+                  <a:srgbClr val="92400E"/>
+                </a:solidFill>
+                <a:latin typeface="Calibri" pitchFamily="34" charset="0"/>
+                <a:ea typeface="Calibri" pitchFamily="34" charset="-122"/>
+                <a:cs typeface="Calibri" pitchFamily="34" charset="-120"/>
+              </a:rPr>
+              <a:t>USE NOW</a:t>
+            </a:r>
+            <a:pPr indent="0" marL="0">
+              <a:buNone/>
+            </a:pPr>
+            <a:r>
+              <a:rPr lang="en-US" sz="1100" dirty="0">
+                <a:solidFill>
+                  <a:srgbClr val="92400E"/>
+                </a:solidFill>
+                <a:latin typeface="Calibri" pitchFamily="34" charset="0"/>
+                <a:ea typeface="Calibri" pitchFamily="34" charset="-122"/>
+                <a:cs typeface="Calibri" pitchFamily="34" charset="-120"/>
+              </a:rPr>
+              <a:t> · the PRG32 tools</a:t>
+            </a:r>
+            <a:endParaRPr lang="en-US" sz="1100" dirty="0"/>
+          </a:p>
+        </p:txBody>
+      </p:sp>
+      <p:sp>
+        <p:nvSpPr>
           <p:cNvPr id="25" name="Slide Number Placeholder 0"/>
           <p:cNvSpPr>
             <a:spLocks noGrp="1"/>
@@ -21743,6 +25642,158 @@
       </p:sp>
       <p:sp>
         <p:nvSpPr>
+          <p:cNvPr id="22" name="Shape 20"/>
+          <p:cNvSpPr/>
+          <p:nvPr/>
+        </p:nvSpPr>
+        <p:spPr>
+          <a:xfrm>
+            <a:off x="9287967" y="91440"/>
+            <a:ext cx="2355088" cy="274320"/>
+          </a:xfrm>
+          <a:prstGeom prst="rect">
+            <a:avLst/>
+          </a:prstGeom>
+          <a:solidFill>
+            <a:srgbClr val="FEF3C7"/>
+          </a:solidFill>
+          <a:ln w="12700">
+            <a:solidFill>
+              <a:srgbClr val="B45309"/>
+            </a:solidFill>
+            <a:prstDash val="solid"/>
+          </a:ln>
+        </p:spPr>
+      </p:sp>
+      <p:sp>
+        <p:nvSpPr>
+          <p:cNvPr id="23" name="Shape 21"/>
+          <p:cNvSpPr/>
+          <p:nvPr/>
+        </p:nvSpPr>
+        <p:spPr>
+          <a:xfrm>
+            <a:off x="9287967" y="91440"/>
+            <a:ext cx="27432" cy="274320"/>
+          </a:xfrm>
+          <a:prstGeom prst="rect">
+            <a:avLst/>
+          </a:prstGeom>
+          <a:solidFill>
+            <a:srgbClr val="B45309"/>
+          </a:solidFill>
+          <a:ln w="12700">
+            <a:solidFill>
+              <a:srgbClr val="B45309"/>
+            </a:solidFill>
+            <a:prstDash val="solid"/>
+          </a:ln>
+        </p:spPr>
+      </p:sp>
+      <p:sp>
+        <p:nvSpPr>
+          <p:cNvPr id="24" name="Shape 22"/>
+          <p:cNvSpPr/>
+          <p:nvPr/>
+        </p:nvSpPr>
+        <p:spPr>
+          <a:xfrm>
+            <a:off x="9342831" y="91440"/>
+            <a:ext cx="27432" cy="274320"/>
+          </a:xfrm>
+          <a:prstGeom prst="rect">
+            <a:avLst/>
+          </a:prstGeom>
+          <a:solidFill>
+            <a:srgbClr val="B45309"/>
+          </a:solidFill>
+          <a:ln w="12700">
+            <a:solidFill>
+              <a:srgbClr val="B45309"/>
+            </a:solidFill>
+            <a:prstDash val="solid"/>
+          </a:ln>
+        </p:spPr>
+      </p:sp>
+      <p:pic>
+        <p:nvPicPr>
+          <p:cNvPr id="25" name="Image 0" descr="preencoded.png">    </p:cNvPr>
+          <p:cNvPicPr>
+            <a:picLocks noChangeAspect="1"/>
+          </p:cNvPicPr>
+          <p:nvPr/>
+        </p:nvPicPr>
+        <p:blipFill>
+          <a:blip r:embed="rId1"/>
+          <a:stretch>
+            <a:fillRect/>
+          </a:stretch>
+        </p:blipFill>
+        <p:spPr>
+          <a:xfrm>
+            <a:off x="9415983" y="128016"/>
+            <a:ext cx="201168" cy="201168"/>
+          </a:xfrm>
+          <a:prstGeom prst="rect">
+            <a:avLst/>
+          </a:prstGeom>
+        </p:spPr>
+      </p:pic>
+      <p:sp>
+        <p:nvSpPr>
+          <p:cNvPr id="26" name="Text 23"/>
+          <p:cNvSpPr txBox="1"/>
+          <p:nvPr/>
+        </p:nvSpPr>
+        <p:spPr>
+          <a:xfrm>
+            <a:off x="9672015" y="91440"/>
+            <a:ext cx="1934464" cy="274320"/>
+          </a:xfrm>
+          <a:prstGeom prst="rect">
+            <a:avLst/>
+          </a:prstGeom>
+          <a:noFill/>
+          <a:ln/>
+        </p:spPr>
+        <p:txBody>
+          <a:bodyPr wrap="square" lIns="0" tIns="0" rIns="0" bIns="0" rtlCol="0" anchor="ctr"/>
+          <a:lstStyle/>
+          <a:p>
+            <a:pPr indent="0" marL="0">
+              <a:buNone/>
+            </a:pPr>
+            <a:r>
+              <a:rPr lang="en-US" sz="1100" b="1" dirty="0">
+                <a:solidFill>
+                  <a:srgbClr val="92400E"/>
+                </a:solidFill>
+                <a:latin typeface="Calibri" pitchFamily="34" charset="0"/>
+                <a:ea typeface="Calibri" pitchFamily="34" charset="-122"/>
+                <a:cs typeface="Calibri" pitchFamily="34" charset="-120"/>
+              </a:rPr>
+              <a:t>USE NOW</a:t>
+            </a:r>
+            <a:pPr indent="0" marL="0">
+              <a:buNone/>
+            </a:pPr>
+            <a:r>
+              <a:rPr lang="en-US" sz="1100" dirty="0">
+                <a:solidFill>
+                  <a:srgbClr val="92400E"/>
+                </a:solidFill>
+                <a:latin typeface="Calibri" pitchFamily="34" charset="0"/>
+                <a:ea typeface="Calibri" pitchFamily="34" charset="-122"/>
+                <a:cs typeface="Calibri" pitchFamily="34" charset="-120"/>
+              </a:rPr>
+              <a:t> · the PRG32 tools</a:t>
+            </a:r>
+            <a:endParaRPr lang="en-US" sz="1100" dirty="0"/>
+          </a:p>
+        </p:txBody>
+      </p:sp>
+      <p:sp>
+        <p:nvSpPr>
           <p:cNvPr id="25" name="Slide Number Placeholder 0"/>
           <p:cNvSpPr>
             <a:spLocks noGrp="1"/>
@@ -22545,6 +26596,158 @@
       </p:sp>
       <p:sp>
         <p:nvSpPr>
+          <p:cNvPr id="17" name="Shape 15"/>
+          <p:cNvSpPr/>
+          <p:nvPr/>
+        </p:nvSpPr>
+        <p:spPr>
+          <a:xfrm>
+            <a:off x="9287967" y="91440"/>
+            <a:ext cx="2355088" cy="274320"/>
+          </a:xfrm>
+          <a:prstGeom prst="rect">
+            <a:avLst/>
+          </a:prstGeom>
+          <a:solidFill>
+            <a:srgbClr val="FEF3C7"/>
+          </a:solidFill>
+          <a:ln w="12700">
+            <a:solidFill>
+              <a:srgbClr val="B45309"/>
+            </a:solidFill>
+            <a:prstDash val="solid"/>
+          </a:ln>
+        </p:spPr>
+      </p:sp>
+      <p:sp>
+        <p:nvSpPr>
+          <p:cNvPr id="18" name="Shape 16"/>
+          <p:cNvSpPr/>
+          <p:nvPr/>
+        </p:nvSpPr>
+        <p:spPr>
+          <a:xfrm>
+            <a:off x="9287967" y="91440"/>
+            <a:ext cx="27432" cy="274320"/>
+          </a:xfrm>
+          <a:prstGeom prst="rect">
+            <a:avLst/>
+          </a:prstGeom>
+          <a:solidFill>
+            <a:srgbClr val="B45309"/>
+          </a:solidFill>
+          <a:ln w="12700">
+            <a:solidFill>
+              <a:srgbClr val="B45309"/>
+            </a:solidFill>
+            <a:prstDash val="solid"/>
+          </a:ln>
+        </p:spPr>
+      </p:sp>
+      <p:sp>
+        <p:nvSpPr>
+          <p:cNvPr id="19" name="Shape 17"/>
+          <p:cNvSpPr/>
+          <p:nvPr/>
+        </p:nvSpPr>
+        <p:spPr>
+          <a:xfrm>
+            <a:off x="9342831" y="91440"/>
+            <a:ext cx="27432" cy="274320"/>
+          </a:xfrm>
+          <a:prstGeom prst="rect">
+            <a:avLst/>
+          </a:prstGeom>
+          <a:solidFill>
+            <a:srgbClr val="B45309"/>
+          </a:solidFill>
+          <a:ln w="12700">
+            <a:solidFill>
+              <a:srgbClr val="B45309"/>
+            </a:solidFill>
+            <a:prstDash val="solid"/>
+          </a:ln>
+        </p:spPr>
+      </p:sp>
+      <p:pic>
+        <p:nvPicPr>
+          <p:cNvPr id="20" name="Image 0" descr="preencoded.png">    </p:cNvPr>
+          <p:cNvPicPr>
+            <a:picLocks noChangeAspect="1"/>
+          </p:cNvPicPr>
+          <p:nvPr/>
+        </p:nvPicPr>
+        <p:blipFill>
+          <a:blip r:embed="rId1"/>
+          <a:stretch>
+            <a:fillRect/>
+          </a:stretch>
+        </p:blipFill>
+        <p:spPr>
+          <a:xfrm>
+            <a:off x="9415983" y="128016"/>
+            <a:ext cx="201168" cy="201168"/>
+          </a:xfrm>
+          <a:prstGeom prst="rect">
+            <a:avLst/>
+          </a:prstGeom>
+        </p:spPr>
+      </p:pic>
+      <p:sp>
+        <p:nvSpPr>
+          <p:cNvPr id="21" name="Text 18"/>
+          <p:cNvSpPr txBox="1"/>
+          <p:nvPr/>
+        </p:nvSpPr>
+        <p:spPr>
+          <a:xfrm>
+            <a:off x="9672015" y="91440"/>
+            <a:ext cx="1934464" cy="274320"/>
+          </a:xfrm>
+          <a:prstGeom prst="rect">
+            <a:avLst/>
+          </a:prstGeom>
+          <a:noFill/>
+          <a:ln/>
+        </p:spPr>
+        <p:txBody>
+          <a:bodyPr wrap="square" lIns="0" tIns="0" rIns="0" bIns="0" rtlCol="0" anchor="ctr"/>
+          <a:lstStyle/>
+          <a:p>
+            <a:pPr indent="0" marL="0">
+              <a:buNone/>
+            </a:pPr>
+            <a:r>
+              <a:rPr lang="en-US" sz="1100" b="1" dirty="0">
+                <a:solidFill>
+                  <a:srgbClr val="92400E"/>
+                </a:solidFill>
+                <a:latin typeface="Calibri" pitchFamily="34" charset="0"/>
+                <a:ea typeface="Calibri" pitchFamily="34" charset="-122"/>
+                <a:cs typeface="Calibri" pitchFamily="34" charset="-120"/>
+              </a:rPr>
+              <a:t>USE NOW</a:t>
+            </a:r>
+            <a:pPr indent="0" marL="0">
+              <a:buNone/>
+            </a:pPr>
+            <a:r>
+              <a:rPr lang="en-US" sz="1100" dirty="0">
+                <a:solidFill>
+                  <a:srgbClr val="92400E"/>
+                </a:solidFill>
+                <a:latin typeface="Calibri" pitchFamily="34" charset="0"/>
+                <a:ea typeface="Calibri" pitchFamily="34" charset="-122"/>
+                <a:cs typeface="Calibri" pitchFamily="34" charset="-120"/>
+              </a:rPr>
+              <a:t> · the PRG32 tools</a:t>
+            </a:r>
+            <a:endParaRPr lang="en-US" sz="1100" dirty="0"/>
+          </a:p>
+        </p:txBody>
+      </p:sp>
+      <p:sp>
+        <p:nvSpPr>
           <p:cNvPr id="25" name="Slide Number Placeholder 0"/>
           <p:cNvSpPr>
             <a:spLocks noGrp="1"/>
@@ -24510,6 +28713,158 @@
               <a:t>doctor checks the installation: see the next slides</a:t>
             </a:r>
             <a:endParaRPr lang="en-US" sz="1300" dirty="0"/>
+          </a:p>
+        </p:txBody>
+      </p:sp>
+      <p:sp>
+        <p:nvSpPr>
+          <p:cNvPr id="17" name="Shape 15"/>
+          <p:cNvSpPr/>
+          <p:nvPr/>
+        </p:nvSpPr>
+        <p:spPr>
+          <a:xfrm>
+            <a:off x="9287967" y="91440"/>
+            <a:ext cx="2355088" cy="274320"/>
+          </a:xfrm>
+          <a:prstGeom prst="rect">
+            <a:avLst/>
+          </a:prstGeom>
+          <a:solidFill>
+            <a:srgbClr val="FEF3C7"/>
+          </a:solidFill>
+          <a:ln w="12700">
+            <a:solidFill>
+              <a:srgbClr val="B45309"/>
+            </a:solidFill>
+            <a:prstDash val="solid"/>
+          </a:ln>
+        </p:spPr>
+      </p:sp>
+      <p:sp>
+        <p:nvSpPr>
+          <p:cNvPr id="18" name="Shape 16"/>
+          <p:cNvSpPr/>
+          <p:nvPr/>
+        </p:nvSpPr>
+        <p:spPr>
+          <a:xfrm>
+            <a:off x="9287967" y="91440"/>
+            <a:ext cx="27432" cy="274320"/>
+          </a:xfrm>
+          <a:prstGeom prst="rect">
+            <a:avLst/>
+          </a:prstGeom>
+          <a:solidFill>
+            <a:srgbClr val="B45309"/>
+          </a:solidFill>
+          <a:ln w="12700">
+            <a:solidFill>
+              <a:srgbClr val="B45309"/>
+            </a:solidFill>
+            <a:prstDash val="solid"/>
+          </a:ln>
+        </p:spPr>
+      </p:sp>
+      <p:sp>
+        <p:nvSpPr>
+          <p:cNvPr id="19" name="Shape 17"/>
+          <p:cNvSpPr/>
+          <p:nvPr/>
+        </p:nvSpPr>
+        <p:spPr>
+          <a:xfrm>
+            <a:off x="9342831" y="91440"/>
+            <a:ext cx="27432" cy="274320"/>
+          </a:xfrm>
+          <a:prstGeom prst="rect">
+            <a:avLst/>
+          </a:prstGeom>
+          <a:solidFill>
+            <a:srgbClr val="B45309"/>
+          </a:solidFill>
+          <a:ln w="12700">
+            <a:solidFill>
+              <a:srgbClr val="B45309"/>
+            </a:solidFill>
+            <a:prstDash val="solid"/>
+          </a:ln>
+        </p:spPr>
+      </p:sp>
+      <p:pic>
+        <p:nvPicPr>
+          <p:cNvPr id="20" name="Image 0" descr="preencoded.png">    </p:cNvPr>
+          <p:cNvPicPr>
+            <a:picLocks noChangeAspect="1"/>
+          </p:cNvPicPr>
+          <p:nvPr/>
+        </p:nvPicPr>
+        <p:blipFill>
+          <a:blip r:embed="rId1"/>
+          <a:stretch>
+            <a:fillRect/>
+          </a:stretch>
+        </p:blipFill>
+        <p:spPr>
+          <a:xfrm>
+            <a:off x="9415983" y="128016"/>
+            <a:ext cx="201168" cy="201168"/>
+          </a:xfrm>
+          <a:prstGeom prst="rect">
+            <a:avLst/>
+          </a:prstGeom>
+        </p:spPr>
+      </p:pic>
+      <p:sp>
+        <p:nvSpPr>
+          <p:cNvPr id="21" name="Text 18"/>
+          <p:cNvSpPr txBox="1"/>
+          <p:nvPr/>
+        </p:nvSpPr>
+        <p:spPr>
+          <a:xfrm>
+            <a:off x="9672015" y="91440"/>
+            <a:ext cx="1934464" cy="274320"/>
+          </a:xfrm>
+          <a:prstGeom prst="rect">
+            <a:avLst/>
+          </a:prstGeom>
+          <a:noFill/>
+          <a:ln/>
+        </p:spPr>
+        <p:txBody>
+          <a:bodyPr wrap="square" lIns="0" tIns="0" rIns="0" bIns="0" rtlCol="0" anchor="ctr"/>
+          <a:lstStyle/>
+          <a:p>
+            <a:pPr indent="0" marL="0">
+              <a:buNone/>
+            </a:pPr>
+            <a:r>
+              <a:rPr lang="en-US" sz="1100" b="1" dirty="0">
+                <a:solidFill>
+                  <a:srgbClr val="92400E"/>
+                </a:solidFill>
+                <a:latin typeface="Calibri" pitchFamily="34" charset="0"/>
+                <a:ea typeface="Calibri" pitchFamily="34" charset="-122"/>
+                <a:cs typeface="Calibri" pitchFamily="34" charset="-120"/>
+              </a:rPr>
+              <a:t>USE NOW</a:t>
+            </a:r>
+            <a:pPr indent="0" marL="0">
+              <a:buNone/>
+            </a:pPr>
+            <a:r>
+              <a:rPr lang="en-US" sz="1100" dirty="0">
+                <a:solidFill>
+                  <a:srgbClr val="92400E"/>
+                </a:solidFill>
+                <a:latin typeface="Calibri" pitchFamily="34" charset="0"/>
+                <a:ea typeface="Calibri" pitchFamily="34" charset="-122"/>
+                <a:cs typeface="Calibri" pitchFamily="34" charset="-120"/>
+              </a:rPr>
+              <a:t> · the PRG32 tools</a:t>
+            </a:r>
+            <a:endParaRPr lang="en-US" sz="1100" dirty="0"/>
           </a:p>
         </p:txBody>
       </p:sp>

--- a/en/slides/01-Computer_Architecture-PRG32_and_PRG32-QT_Setup-Code.pptx
+++ b/en/slides/01-Computer_Architecture-PRG32_and_PRG32-QT_Setup-Code.pptx
@@ -134,13 +134,13 @@
   <p:extLst>
     <p:ext uri="{521415D9-36F7-43E2-AB2F-B90AF26B5E84}">
       <p14:sectionLst xmlns:p14="http://schemas.microsoft.com/office/powerpoint/2010/main">
-        <p14:section name="Opening" id="{0d204205-9ef9-0d76-5330-a816473c28f8}">
+        <p14:section name="Opening" id="{4562b4c2-3a34-61d3-ec58-ee53488d2a10}">
           <p14:sldIdLst>
             <p14:sldId id="256"/>
             <p14:sldId id="257"/>
           </p14:sldIdLst>
         </p14:section>
-        <p14:section name="Step 1: install PRG32-QT" id="{d31ec627-0e6c-0ae6-e736-d9e385026cf5}">
+        <p14:section name="Step 1: install PRG32-QT" id="{678555cb-8cf2-a319-ee3a-2542301df75d}">
           <p14:sldIdLst>
             <p14:sldId id="258"/>
             <p14:sldId id="259"/>
@@ -150,7 +150,7 @@
             <p14:sldId id="263"/>
           </p14:sldIdLst>
         </p14:section>
-        <p14:section name="Step 2: install the toolchain" id="{85a2508f-b13c-a3b7-0bff-3664b0970c84}">
+        <p14:section name="Step 2: install the toolchain" id="{2d3f9f67-f8bf-4093-e6ee-8b0768df44ec}">
           <p14:sldIdLst>
             <p14:sldId id="264"/>
             <p14:sldId id="265"/>
@@ -159,7 +159,7 @@
             <p14:sldId id="268"/>
           </p14:sldIdLst>
         </p14:section>
-        <p14:section name="Step 3: your first build" id="{50e96c5e-5328-6662-05e3-56959bfe3253}">
+        <p14:section name="Step 3: your first build" id="{7bf823ae-9606-b5ed-de02-944f3d5bfbcc}">
           <p14:sldIdLst>
             <p14:sldId id="269"/>
             <p14:sldId id="270"/>
@@ -167,20 +167,20 @@
             <p14:sldId id="272"/>
           </p14:sldIdLst>
         </p14:section>
-        <p14:section name="Optional: QEMU and the kit" id="{84a63e8b-70b2-9029-37e2-c274cb5c0df3}">
+        <p14:section name="Optional: QEMU and the kit" id="{c9135c03-1196-9764-45f1-e39ca6c9be05}">
           <p14:sldIdLst>
             <p14:sldId id="273"/>
             <p14:sldId id="274"/>
           </p14:sldIdLst>
         </p14:section>
-        <p14:section name="The complete program" id="{a5cdea15-9324-7382-5739-28bdecb26169}">
+        <p14:section name="The complete program" id="{6f162edc-265b-bae2-8df3-5d59f78f9813}">
           <p14:sldIdLst>
             <p14:sldId id="275"/>
             <p14:sldId id="276"/>
             <p14:sldId id="277"/>
           </p14:sldIdLst>
         </p14:section>
-        <p14:section name="Run it and test it" id="{aed0849d-0c75-b859-af1d-5b060b147153}">
+        <p14:section name="Run it and test it" id="{f5b8d32c-383f-3097-fc68-04c1ccb33721}">
           <p14:sldIdLst>
             <p14:sldId id="278"/>
             <p14:sldId id="279"/>
@@ -189,7 +189,7 @@
             <p14:sldId id="282"/>
           </p14:sldIdLst>
         </p14:section>
-        <p14:section name="Exercises" id="{f5967cad-faed-61cf-3483-7b9269908700}">
+        <p14:section name="Exercises" id="{ad63b061-88c1-4245-8b20-ba756319bd78}">
           <p14:sldIdLst>
             <p14:sldId id="283"/>
           </p14:sldIdLst>
